--- a/figures/Figure5_case4.pptx
+++ b/figures/Figure5_case4.pptx
@@ -11929,6 +11929,36 @@
       </p:grpSpPr>
       <p:pic>
         <p:nvPicPr>
+          <p:cNvPr id="37" name="Picture 36">
+            <a:extLst>
+              <a:ext uri="{FF2B5EF4-FFF2-40B4-BE49-F238E27FC236}">
+                <a16:creationId xmlns:a16="http://schemas.microsoft.com/office/drawing/2014/main" id="{24A3C73E-E816-E8B2-6DC7-F15F1862A456}"/>
+              </a:ext>
+            </a:extLst>
+          </p:cNvPr>
+          <p:cNvPicPr>
+            <a:picLocks noChangeAspect="1"/>
+          </p:cNvPicPr>
+          <p:nvPr/>
+        </p:nvPicPr>
+        <p:blipFill>
+          <a:blip r:embed="rId3"/>
+          <a:stretch>
+            <a:fillRect/>
+          </a:stretch>
+        </p:blipFill>
+        <p:spPr>
+          <a:xfrm>
+            <a:off x="10532883" y="2755440"/>
+            <a:ext cx="2940976" cy="2420449"/>
+          </a:xfrm>
+          <a:prstGeom prst="rect">
+            <a:avLst/>
+          </a:prstGeom>
+        </p:spPr>
+      </p:pic>
+      <p:pic>
+        <p:nvPicPr>
           <p:cNvPr id="29" name="Picture 28">
             <a:extLst>
               <a:ext uri="{FF2B5EF4-FFF2-40B4-BE49-F238E27FC236}">
@@ -11942,7 +11972,7 @@
           <p:nvPr/>
         </p:nvPicPr>
         <p:blipFill>
-          <a:blip r:embed="rId3"/>
+          <a:blip r:embed="rId4"/>
           <a:stretch>
             <a:fillRect/>
           </a:stretch>
@@ -11972,15 +12002,15 @@
           <p:nvPr/>
         </p:nvPicPr>
         <p:blipFill>
-          <a:blip r:embed="rId4"/>
+          <a:blip r:embed="rId5"/>
           <a:stretch>
             <a:fillRect/>
           </a:stretch>
         </p:blipFill>
         <p:spPr>
           <a:xfrm>
-            <a:off x="-25532" y="0"/>
-            <a:ext cx="3376318" cy="5191968"/>
+            <a:off x="164390" y="77789"/>
+            <a:ext cx="3217106" cy="4947138"/>
           </a:xfrm>
           <a:prstGeom prst="rect">
             <a:avLst/>
@@ -12198,7 +12228,7 @@
             <a:r>
               <a:rPr lang="en-CA" sz="1800" dirty="0">
                 <a:solidFill>
-                  <a:schemeClr val="dk1"/>
+                  <a:schemeClr val="tx1"/>
                 </a:solidFill>
                 <a:latin typeface="Arial"/>
                 <a:ea typeface="Arial"/>
@@ -12207,7 +12237,11 @@
               </a:rPr>
               <a:t>d.</a:t>
             </a:r>
-            <a:endParaRPr dirty="0"/>
+            <a:endParaRPr dirty="0">
+              <a:solidFill>
+                <a:schemeClr val="tx1"/>
+              </a:solidFill>
+            </a:endParaRPr>
           </a:p>
         </p:txBody>
       </p:sp>
@@ -12226,7 +12260,7 @@
           <p:nvPr/>
         </p:nvPicPr>
         <p:blipFill>
-          <a:blip r:embed="rId5"/>
+          <a:blip r:embed="rId6"/>
           <a:stretch>
             <a:fillRect/>
           </a:stretch>
@@ -12235,36 +12269,6 @@
           <a:xfrm>
             <a:off x="3632410" y="460433"/>
             <a:ext cx="6453344" cy="4635500"/>
-          </a:xfrm>
-          <a:prstGeom prst="rect">
-            <a:avLst/>
-          </a:prstGeom>
-        </p:spPr>
-      </p:pic>
-      <p:pic>
-        <p:nvPicPr>
-          <p:cNvPr id="37" name="Picture 36">
-            <a:extLst>
-              <a:ext uri="{FF2B5EF4-FFF2-40B4-BE49-F238E27FC236}">
-                <a16:creationId xmlns:a16="http://schemas.microsoft.com/office/drawing/2014/main" id="{24A3C73E-E816-E8B2-6DC7-F15F1862A456}"/>
-              </a:ext>
-            </a:extLst>
-          </p:cNvPr>
-          <p:cNvPicPr>
-            <a:picLocks noChangeAspect="1"/>
-          </p:cNvPicPr>
-          <p:nvPr/>
-        </p:nvPicPr>
-        <p:blipFill>
-          <a:blip r:embed="rId6"/>
-          <a:stretch>
-            <a:fillRect/>
-          </a:stretch>
-        </p:blipFill>
-        <p:spPr>
-          <a:xfrm>
-            <a:off x="10532883" y="2755440"/>
-            <a:ext cx="2940976" cy="2420449"/>
           </a:xfrm>
           <a:prstGeom prst="rect">
             <a:avLst/>

--- a/figures/Figure5_case4.pptx
+++ b/figures/Figure5_case4.pptx
@@ -253,7 +253,7 @@
       <p15:sldGuideLst xmlns:p15="http://schemas.microsoft.com/office/powerpoint/2012/main"/>
     </p:ext>
     <p:ext uri="GoogleSlidesCustomDataVersion2">
-      <go:slidesCustomData xmlns="" xmlns:mc="http://schemas.openxmlformats.org/markup-compatibility/2006" xmlns:mv="urn:schemas-microsoft-com:mac:vml" xmlns:c="http://schemas.openxmlformats.org/drawingml/2006/chart" xmlns:dgm="http://schemas.openxmlformats.org/drawingml/2006/diagram" xmlns:o="urn:schemas-microsoft-com:office:office" xmlns:v="urn:schemas-microsoft-com:vml" xmlns:pvml="urn:schemas-microsoft-com:office:powerpoint" xmlns:com="http://schemas.openxmlformats.org/drawingml/2006/compatibility" xmlns:p14="http://schemas.microsoft.com/office/powerpoint/2010/main" xmlns:p15="http://schemas.microsoft.com/office/powerpoint/2012/main" xmlns:ahyp="http://schemas.microsoft.com/office/drawing/2018/hyperlinkcolor" xmlns:go="http://customooxmlschemas.google.com/" r:id="rId8" roundtripDataSignature="AMtx7mi553m8NdOJu3RJVRvvSDH2Dnf3KQ=="/>
+      <go:slidesCustomData xmlns:go="http://customooxmlschemas.google.com/" xmlns:ahyp="http://schemas.microsoft.com/office/drawing/2018/hyperlinkcolor" xmlns:p15="http://schemas.microsoft.com/office/powerpoint/2012/main" xmlns:p14="http://schemas.microsoft.com/office/powerpoint/2010/main" xmlns:com="http://schemas.openxmlformats.org/drawingml/2006/compatibility" xmlns:pvml="urn:schemas-microsoft-com:office:powerpoint" xmlns:v="urn:schemas-microsoft-com:vml" xmlns:o="urn:schemas-microsoft-com:office:office" xmlns:dgm="http://schemas.openxmlformats.org/drawingml/2006/diagram" xmlns:c="http://schemas.openxmlformats.org/drawingml/2006/chart" xmlns:mv="urn:schemas-microsoft-com:mac:vml" xmlns:mc="http://schemas.openxmlformats.org/markup-compatibility/2006" xmlns="" r:id="rId8" roundtripDataSignature="AMtx7mi553m8NdOJu3RJVRvvSDH2Dnf3KQ=="/>
     </p:ext>
   </p:extLst>
 </p:presentation>
@@ -12040,6 +12040,98 @@
       </p:grpSpPr>
       <p:pic>
         <p:nvPicPr>
+          <p:cNvPr id="10" name="Picture 9">
+            <a:extLst>
+              <a:ext uri="{FF2B5EF4-FFF2-40B4-BE49-F238E27FC236}">
+                <a16:creationId xmlns:a16="http://schemas.microsoft.com/office/drawing/2014/main" id="{E6433341-3236-782D-0064-8FDEE47EEA3A}"/>
+              </a:ext>
+            </a:extLst>
+          </p:cNvPr>
+          <p:cNvPicPr>
+            <a:picLocks noChangeAspect="1"/>
+          </p:cNvPicPr>
+          <p:nvPr/>
+        </p:nvPicPr>
+        <p:blipFill>
+          <a:blip r:embed="rId3"/>
+          <a:srcRect l="49174" t="47076"/>
+          <a:stretch>
+            <a:fillRect/>
+          </a:stretch>
+        </p:blipFill>
+        <p:spPr>
+          <a:xfrm>
+            <a:off x="7088103" y="201535"/>
+            <a:ext cx="3098573" cy="2267589"/>
+          </a:xfrm>
+          <a:prstGeom prst="rect">
+            <a:avLst/>
+          </a:prstGeom>
+        </p:spPr>
+      </p:pic>
+      <p:pic>
+        <p:nvPicPr>
+          <p:cNvPr id="7" name="Picture 6">
+            <a:extLst>
+              <a:ext uri="{FF2B5EF4-FFF2-40B4-BE49-F238E27FC236}">
+                <a16:creationId xmlns:a16="http://schemas.microsoft.com/office/drawing/2014/main" id="{32D4203C-4DBA-E614-B24C-DE1886C6FBF6}"/>
+              </a:ext>
+            </a:extLst>
+          </p:cNvPr>
+          <p:cNvPicPr>
+            <a:picLocks noChangeAspect="1"/>
+          </p:cNvPicPr>
+          <p:nvPr/>
+        </p:nvPicPr>
+        <p:blipFill>
+          <a:blip r:embed="rId4"/>
+          <a:stretch>
+            <a:fillRect/>
+          </a:stretch>
+        </p:blipFill>
+        <p:spPr>
+          <a:xfrm>
+            <a:off x="10222880" y="225753"/>
+            <a:ext cx="3456608" cy="2541623"/>
+          </a:xfrm>
+          <a:prstGeom prst="rect">
+            <a:avLst/>
+          </a:prstGeom>
+        </p:spPr>
+      </p:pic>
+      <p:pic>
+        <p:nvPicPr>
+          <p:cNvPr id="5" name="Picture 4">
+            <a:extLst>
+              <a:ext uri="{FF2B5EF4-FFF2-40B4-BE49-F238E27FC236}">
+                <a16:creationId xmlns:a16="http://schemas.microsoft.com/office/drawing/2014/main" id="{01AA7D13-AA8E-925E-B953-1B17F80AB20E}"/>
+              </a:ext>
+            </a:extLst>
+          </p:cNvPr>
+          <p:cNvPicPr>
+            <a:picLocks noChangeAspect="1"/>
+          </p:cNvPicPr>
+          <p:nvPr/>
+        </p:nvPicPr>
+        <p:blipFill>
+          <a:blip r:embed="rId3"/>
+          <a:srcRect t="47076" r="50789"/>
+          <a:stretch>
+            <a:fillRect/>
+          </a:stretch>
+        </p:blipFill>
+        <p:spPr>
+          <a:xfrm>
+            <a:off x="3738831" y="98973"/>
+            <a:ext cx="3000132" cy="2267589"/>
+          </a:xfrm>
+          <a:prstGeom prst="rect">
+            <a:avLst/>
+          </a:prstGeom>
+        </p:spPr>
+      </p:pic>
+      <p:pic>
+        <p:nvPicPr>
           <p:cNvPr id="41" name="Picture 40">
             <a:extLst>
               <a:ext uri="{FF2B5EF4-FFF2-40B4-BE49-F238E27FC236}">
@@ -12053,15 +12145,15 @@
           <p:nvPr/>
         </p:nvPicPr>
         <p:blipFill>
-          <a:blip r:embed="rId3"/>
+          <a:blip r:embed="rId5"/>
           <a:stretch>
             <a:fillRect/>
           </a:stretch>
         </p:blipFill>
         <p:spPr>
           <a:xfrm>
-            <a:off x="-8138" y="71263"/>
-            <a:ext cx="3785007" cy="6300923"/>
+            <a:off x="-8137" y="71264"/>
+            <a:ext cx="3397828" cy="5656384"/>
           </a:xfrm>
           <a:prstGeom prst="rect">
             <a:avLst/>
@@ -12082,7 +12174,7 @@
         </p:nvSpPr>
         <p:spPr>
           <a:xfrm>
-            <a:off x="3905085" y="2201"/>
+            <a:off x="3738831" y="2201"/>
             <a:ext cx="815546" cy="369332"/>
           </a:xfrm>
           <a:prstGeom prst="rect">
@@ -12180,67 +12272,6 @@
           </a:p>
         </p:txBody>
       </p:sp>
-      <p:pic>
-        <p:nvPicPr>
-          <p:cNvPr id="44" name="Picture 43">
-            <a:extLst>
-              <a:ext uri="{FF2B5EF4-FFF2-40B4-BE49-F238E27FC236}">
-                <a16:creationId xmlns:a16="http://schemas.microsoft.com/office/drawing/2014/main" id="{D40996F5-8592-D589-F474-8ADC137BAF90}"/>
-              </a:ext>
-            </a:extLst>
-          </p:cNvPr>
-          <p:cNvPicPr>
-            <a:picLocks noChangeAspect="1"/>
-          </p:cNvPicPr>
-          <p:nvPr/>
-        </p:nvPicPr>
-        <p:blipFill>
-          <a:blip r:embed="rId4"/>
-          <a:stretch>
-            <a:fillRect/>
-          </a:stretch>
-        </p:blipFill>
-        <p:spPr>
-          <a:xfrm>
-            <a:off x="10258765" y="71264"/>
-            <a:ext cx="3411737" cy="2500268"/>
-          </a:xfrm>
-          <a:prstGeom prst="rect">
-            <a:avLst/>
-          </a:prstGeom>
-        </p:spPr>
-      </p:pic>
-      <p:pic>
-        <p:nvPicPr>
-          <p:cNvPr id="45" name="Picture 44">
-            <a:extLst>
-              <a:ext uri="{FF2B5EF4-FFF2-40B4-BE49-F238E27FC236}">
-                <a16:creationId xmlns:a16="http://schemas.microsoft.com/office/drawing/2014/main" id="{83DF5717-E5AA-2FF4-8978-C0F0638B17D5}"/>
-              </a:ext>
-            </a:extLst>
-          </p:cNvPr>
-          <p:cNvPicPr>
-            <a:picLocks noChangeAspect="1"/>
-          </p:cNvPicPr>
-          <p:nvPr/>
-        </p:nvPicPr>
-        <p:blipFill>
-          <a:blip r:embed="rId5"/>
-          <a:srcRect t="49257"/>
-          <a:stretch>
-            <a:fillRect/>
-          </a:stretch>
-        </p:blipFill>
-        <p:spPr>
-          <a:xfrm>
-            <a:off x="4147186" y="71264"/>
-            <a:ext cx="5843568" cy="2130163"/>
-          </a:xfrm>
-          <a:prstGeom prst="rect">
-            <a:avLst/>
-          </a:prstGeom>
-        </p:spPr>
-      </p:pic>
       <p:sp>
         <p:nvSpPr>
           <p:cNvPr id="46" name="Google Shape;91;p1">
@@ -12255,7 +12286,7 @@
         </p:nvSpPr>
         <p:spPr>
           <a:xfrm>
-            <a:off x="10010867" y="2201"/>
+            <a:off x="10157007" y="2242"/>
             <a:ext cx="815546" cy="369291"/>
           </a:xfrm>
           <a:prstGeom prst="rect">
@@ -12307,7 +12338,7 @@
         </p:nvSpPr>
         <p:spPr>
           <a:xfrm>
-            <a:off x="6947919" y="0"/>
+            <a:off x="6947919" y="2201"/>
             <a:ext cx="815546" cy="369332"/>
           </a:xfrm>
           <a:prstGeom prst="rect">
@@ -12363,7 +12394,7 @@
         </p:nvSpPr>
         <p:spPr>
           <a:xfrm>
-            <a:off x="3825573" y="2558972"/>
+            <a:off x="3738831" y="2882992"/>
             <a:ext cx="815546" cy="369291"/>
           </a:xfrm>
           <a:prstGeom prst="rect">
@@ -12403,10 +12434,10 @@
       </p:sp>
       <p:pic>
         <p:nvPicPr>
-          <p:cNvPr id="49" name="Picture 48">
+          <p:cNvPr id="16" name="Picture 15">
             <a:extLst>
               <a:ext uri="{FF2B5EF4-FFF2-40B4-BE49-F238E27FC236}">
-                <a16:creationId xmlns:a16="http://schemas.microsoft.com/office/drawing/2014/main" id="{19DDC83E-5074-6153-8B05-B1EEC4050DA6}"/>
+                <a16:creationId xmlns:a16="http://schemas.microsoft.com/office/drawing/2014/main" id="{BD4E7BB8-570A-4E6A-E29A-966481BF462D}"/>
               </a:ext>
             </a:extLst>
           </p:cNvPr>
@@ -12417,15 +12448,210 @@
         </p:nvPicPr>
         <p:blipFill>
           <a:blip r:embed="rId6"/>
-          <a:srcRect b="5852"/>
           <a:stretch>
             <a:fillRect/>
           </a:stretch>
         </p:blipFill>
         <p:spPr>
           <a:xfrm>
-            <a:off x="4233346" y="2640596"/>
-            <a:ext cx="8889174" cy="3839580"/>
+            <a:off x="7311014" y="2990887"/>
+            <a:ext cx="2911866" cy="2911866"/>
+          </a:xfrm>
+          <a:prstGeom prst="rect">
+            <a:avLst/>
+          </a:prstGeom>
+        </p:spPr>
+      </p:pic>
+      <p:pic>
+        <p:nvPicPr>
+          <p:cNvPr id="18" name="Picture 17">
+            <a:extLst>
+              <a:ext uri="{FF2B5EF4-FFF2-40B4-BE49-F238E27FC236}">
+                <a16:creationId xmlns:a16="http://schemas.microsoft.com/office/drawing/2014/main" id="{AF885531-729D-0D66-242F-8119B4AEEDD7}"/>
+              </a:ext>
+            </a:extLst>
+          </p:cNvPr>
+          <p:cNvPicPr>
+            <a:picLocks noChangeAspect="1"/>
+          </p:cNvPicPr>
+          <p:nvPr/>
+        </p:nvPicPr>
+        <p:blipFill>
+          <a:blip r:embed="rId7"/>
+          <a:stretch>
+            <a:fillRect/>
+          </a:stretch>
+        </p:blipFill>
+        <p:spPr>
+          <a:xfrm>
+            <a:off x="4030720" y="2985554"/>
+            <a:ext cx="2917199" cy="2917199"/>
+          </a:xfrm>
+          <a:prstGeom prst="rect">
+            <a:avLst/>
+          </a:prstGeom>
+        </p:spPr>
+      </p:pic>
+      <p:sp>
+        <p:nvSpPr>
+          <p:cNvPr id="19" name="Google Shape;91;p1">
+            <a:extLst>
+              <a:ext uri="{FF2B5EF4-FFF2-40B4-BE49-F238E27FC236}">
+                <a16:creationId xmlns:a16="http://schemas.microsoft.com/office/drawing/2014/main" id="{3875D118-23AB-1A27-DA2E-3ACC6C7B786F}"/>
+              </a:ext>
+            </a:extLst>
+          </p:cNvPr>
+          <p:cNvSpPr txBox="1"/>
+          <p:nvPr/>
+        </p:nvSpPr>
+        <p:spPr>
+          <a:xfrm>
+            <a:off x="7011576" y="2882992"/>
+            <a:ext cx="815546" cy="369291"/>
+          </a:xfrm>
+          <a:prstGeom prst="rect">
+            <a:avLst/>
+          </a:prstGeom>
+          <a:noFill/>
+          <a:ln>
+            <a:noFill/>
+          </a:ln>
+        </p:spPr>
+        <p:txBody>
+          <a:bodyPr spcFirstLastPara="1" wrap="square" lIns="91425" tIns="45700" rIns="91425" bIns="45700" anchor="t" anchorCtr="0">
+            <a:spAutoFit/>
+          </a:bodyPr>
+          <a:lstStyle/>
+          <a:p>
+            <a:pPr marL="0" marR="0" lvl="0" indent="0" algn="l" rtl="0">
+              <a:spcBef>
+                <a:spcPts val="0"/>
+              </a:spcBef>
+              <a:spcAft>
+                <a:spcPts val="0"/>
+              </a:spcAft>
+              <a:buNone/>
+            </a:pPr>
+            <a:r>
+              <a:rPr lang="en-CA" sz="1800" dirty="0">
+                <a:solidFill>
+                  <a:schemeClr val="dk1"/>
+                </a:solidFill>
+              </a:rPr>
+              <a:t>f</a:t>
+            </a:r>
+            <a:endParaRPr dirty="0"/>
+          </a:p>
+        </p:txBody>
+      </p:sp>
+      <p:sp>
+        <p:nvSpPr>
+          <p:cNvPr id="22" name="Google Shape;91;p1">
+            <a:extLst>
+              <a:ext uri="{FF2B5EF4-FFF2-40B4-BE49-F238E27FC236}">
+                <a16:creationId xmlns:a16="http://schemas.microsoft.com/office/drawing/2014/main" id="{B3A7C325-D5A7-5217-3452-7BB416CDA52A}"/>
+              </a:ext>
+            </a:extLst>
+          </p:cNvPr>
+          <p:cNvSpPr txBox="1"/>
+          <p:nvPr/>
+        </p:nvSpPr>
+        <p:spPr>
+          <a:xfrm>
+            <a:off x="10296793" y="2882992"/>
+            <a:ext cx="815546" cy="369291"/>
+          </a:xfrm>
+          <a:prstGeom prst="rect">
+            <a:avLst/>
+          </a:prstGeom>
+          <a:noFill/>
+          <a:ln>
+            <a:noFill/>
+          </a:ln>
+        </p:spPr>
+        <p:txBody>
+          <a:bodyPr spcFirstLastPara="1" wrap="square" lIns="91425" tIns="45700" rIns="91425" bIns="45700" anchor="t" anchorCtr="0">
+            <a:spAutoFit/>
+          </a:bodyPr>
+          <a:lstStyle/>
+          <a:p>
+            <a:pPr marL="0" marR="0" lvl="0" indent="0" algn="l" rtl="0">
+              <a:spcBef>
+                <a:spcPts val="0"/>
+              </a:spcBef>
+              <a:spcAft>
+                <a:spcPts val="0"/>
+              </a:spcAft>
+              <a:buNone/>
+            </a:pPr>
+            <a:r>
+              <a:rPr lang="en-CA" sz="1800" dirty="0">
+                <a:solidFill>
+                  <a:schemeClr val="dk1"/>
+                </a:solidFill>
+              </a:rPr>
+              <a:t>g</a:t>
+            </a:r>
+            <a:endParaRPr dirty="0"/>
+          </a:p>
+        </p:txBody>
+      </p:sp>
+      <p:pic>
+        <p:nvPicPr>
+          <p:cNvPr id="24" name="Picture 23">
+            <a:extLst>
+              <a:ext uri="{FF2B5EF4-FFF2-40B4-BE49-F238E27FC236}">
+                <a16:creationId xmlns:a16="http://schemas.microsoft.com/office/drawing/2014/main" id="{D3EE6C47-54C9-533D-6E8D-185E6DE75510}"/>
+              </a:ext>
+            </a:extLst>
+          </p:cNvPr>
+          <p:cNvPicPr>
+            <a:picLocks noChangeAspect="1"/>
+          </p:cNvPicPr>
+          <p:nvPr/>
+        </p:nvPicPr>
+        <p:blipFill>
+          <a:blip r:embed="rId8"/>
+          <a:srcRect r="7426" b="3594"/>
+          <a:stretch>
+            <a:fillRect/>
+          </a:stretch>
+        </p:blipFill>
+        <p:spPr>
+          <a:xfrm>
+            <a:off x="10522318" y="2882992"/>
+            <a:ext cx="3130509" cy="3003297"/>
+          </a:xfrm>
+          <a:prstGeom prst="rect">
+            <a:avLst/>
+          </a:prstGeom>
+        </p:spPr>
+      </p:pic>
+      <p:pic>
+        <p:nvPicPr>
+          <p:cNvPr id="25" name="Picture 24">
+            <a:extLst>
+              <a:ext uri="{FF2B5EF4-FFF2-40B4-BE49-F238E27FC236}">
+                <a16:creationId xmlns:a16="http://schemas.microsoft.com/office/drawing/2014/main" id="{11F2295A-D3FA-1D40-DF15-081C4AB8C6A6}"/>
+              </a:ext>
+            </a:extLst>
+          </p:cNvPr>
+          <p:cNvPicPr>
+            <a:picLocks noChangeAspect="1"/>
+          </p:cNvPicPr>
+          <p:nvPr/>
+        </p:nvPicPr>
+        <p:blipFill>
+          <a:blip r:embed="rId3"/>
+          <a:srcRect t="47076" r="50789"/>
+          <a:stretch>
+            <a:fillRect/>
+          </a:stretch>
+        </p:blipFill>
+        <p:spPr>
+          <a:xfrm>
+            <a:off x="3891231" y="251373"/>
+            <a:ext cx="3000132" cy="2267589"/>
           </a:xfrm>
           <a:prstGeom prst="rect">
             <a:avLst/>

--- a/figures/Figure5_case4.pptx
+++ b/figures/Figure5_case4.pptx
@@ -253,7 +253,7 @@
       <p15:sldGuideLst xmlns:p15="http://schemas.microsoft.com/office/powerpoint/2012/main"/>
     </p:ext>
     <p:ext uri="GoogleSlidesCustomDataVersion2">
-      <go:slidesCustomData xmlns:go="http://customooxmlschemas.google.com/" xmlns:ahyp="http://schemas.microsoft.com/office/drawing/2018/hyperlinkcolor" xmlns:p15="http://schemas.microsoft.com/office/powerpoint/2012/main" xmlns:p14="http://schemas.microsoft.com/office/powerpoint/2010/main" xmlns:com="http://schemas.openxmlformats.org/drawingml/2006/compatibility" xmlns:pvml="urn:schemas-microsoft-com:office:powerpoint" xmlns:v="urn:schemas-microsoft-com:vml" xmlns:o="urn:schemas-microsoft-com:office:office" xmlns:dgm="http://schemas.openxmlformats.org/drawingml/2006/diagram" xmlns:c="http://schemas.openxmlformats.org/drawingml/2006/chart" xmlns:mv="urn:schemas-microsoft-com:mac:vml" xmlns:mc="http://schemas.openxmlformats.org/markup-compatibility/2006" xmlns="" r:id="rId8" roundtripDataSignature="AMtx7mi553m8NdOJu3RJVRvvSDH2Dnf3KQ=="/>
+      <go:slidesCustomData xmlns="" xmlns:mc="http://schemas.openxmlformats.org/markup-compatibility/2006" xmlns:mv="urn:schemas-microsoft-com:mac:vml" xmlns:c="http://schemas.openxmlformats.org/drawingml/2006/chart" xmlns:dgm="http://schemas.openxmlformats.org/drawingml/2006/diagram" xmlns:o="urn:schemas-microsoft-com:office:office" xmlns:v="urn:schemas-microsoft-com:vml" xmlns:pvml="urn:schemas-microsoft-com:office:powerpoint" xmlns:com="http://schemas.openxmlformats.org/drawingml/2006/compatibility" xmlns:p14="http://schemas.microsoft.com/office/powerpoint/2010/main" xmlns:p15="http://schemas.microsoft.com/office/powerpoint/2012/main" xmlns:ahyp="http://schemas.microsoft.com/office/drawing/2018/hyperlinkcolor" xmlns:go="http://customooxmlschemas.google.com/" r:id="rId8" roundtripDataSignature="AMtx7mi553m8NdOJu3RJVRvvSDH2Dnf3KQ=="/>
     </p:ext>
   </p:extLst>
 </p:presentation>
@@ -12054,15 +12054,15 @@
         </p:nvPicPr>
         <p:blipFill>
           <a:blip r:embed="rId3"/>
-          <a:srcRect l="49174" t="47076"/>
+          <a:srcRect l="49174" t="54686"/>
           <a:stretch>
             <a:fillRect/>
           </a:stretch>
         </p:blipFill>
         <p:spPr>
           <a:xfrm>
-            <a:off x="7088103" y="201535"/>
-            <a:ext cx="3098573" cy="2267589"/>
+            <a:off x="7088103" y="527584"/>
+            <a:ext cx="3098573" cy="1941540"/>
           </a:xfrm>
           <a:prstGeom prst="rect">
             <a:avLst/>
@@ -12093,37 +12093,6 @@
           <a:xfrm>
             <a:off x="10222880" y="225753"/>
             <a:ext cx="3456608" cy="2541623"/>
-          </a:xfrm>
-          <a:prstGeom prst="rect">
-            <a:avLst/>
-          </a:prstGeom>
-        </p:spPr>
-      </p:pic>
-      <p:pic>
-        <p:nvPicPr>
-          <p:cNvPr id="5" name="Picture 4">
-            <a:extLst>
-              <a:ext uri="{FF2B5EF4-FFF2-40B4-BE49-F238E27FC236}">
-                <a16:creationId xmlns:a16="http://schemas.microsoft.com/office/drawing/2014/main" id="{01AA7D13-AA8E-925E-B953-1B17F80AB20E}"/>
-              </a:ext>
-            </a:extLst>
-          </p:cNvPr>
-          <p:cNvPicPr>
-            <a:picLocks noChangeAspect="1"/>
-          </p:cNvPicPr>
-          <p:nvPr/>
-        </p:nvPicPr>
-        <p:blipFill>
-          <a:blip r:embed="rId3"/>
-          <a:srcRect t="47076" r="50789"/>
-          <a:stretch>
-            <a:fillRect/>
-          </a:stretch>
-        </p:blipFill>
-        <p:spPr>
-          <a:xfrm>
-            <a:off x="3738831" y="98973"/>
-            <a:ext cx="3000132" cy="2267589"/>
           </a:xfrm>
           <a:prstGeom prst="rect">
             <a:avLst/>
@@ -12643,15 +12612,15 @@
         </p:nvPicPr>
         <p:blipFill>
           <a:blip r:embed="rId3"/>
-          <a:srcRect t="47076" r="50789"/>
+          <a:srcRect t="54686" r="50789"/>
           <a:stretch>
             <a:fillRect/>
           </a:stretch>
         </p:blipFill>
         <p:spPr>
           <a:xfrm>
-            <a:off x="3891231" y="251373"/>
-            <a:ext cx="3000132" cy="2267589"/>
+            <a:off x="3773217" y="525794"/>
+            <a:ext cx="3000132" cy="1941540"/>
           </a:xfrm>
           <a:prstGeom prst="rect">
             <a:avLst/>

--- a/figures/Figure5_case4.pptx
+++ b/figures/Figure5_case4.pptx
@@ -10,7 +10,7 @@
   <p:sldIdLst>
     <p:sldId id="256" r:id="rId2"/>
   </p:sldIdLst>
-  <p:sldSz cx="13679488" cy="6480175"/>
+  <p:sldSz cx="6858000" cy="9144000" type="letter"/>
   <p:notesSz cx="6858000" cy="9144000"/>
   <p:embeddedFontLst>
     <p:embeddedFont>
@@ -253,7 +253,7 @@
       <p15:sldGuideLst xmlns:p15="http://schemas.microsoft.com/office/powerpoint/2012/main"/>
     </p:ext>
     <p:ext uri="GoogleSlidesCustomDataVersion2">
-      <go:slidesCustomData xmlns="" xmlns:mc="http://schemas.openxmlformats.org/markup-compatibility/2006" xmlns:mv="urn:schemas-microsoft-com:mac:vml" xmlns:c="http://schemas.openxmlformats.org/drawingml/2006/chart" xmlns:dgm="http://schemas.openxmlformats.org/drawingml/2006/diagram" xmlns:o="urn:schemas-microsoft-com:office:office" xmlns:v="urn:schemas-microsoft-com:vml" xmlns:pvml="urn:schemas-microsoft-com:office:powerpoint" xmlns:com="http://schemas.openxmlformats.org/drawingml/2006/compatibility" xmlns:p14="http://schemas.microsoft.com/office/powerpoint/2010/main" xmlns:p15="http://schemas.microsoft.com/office/powerpoint/2012/main" xmlns:ahyp="http://schemas.microsoft.com/office/drawing/2018/hyperlinkcolor" xmlns:go="http://customooxmlschemas.google.com/" r:id="rId8" roundtripDataSignature="AMtx7mi553m8NdOJu3RJVRvvSDH2Dnf3KQ=="/>
+      <go:slidesCustomData xmlns:go="http://customooxmlschemas.google.com/" xmlns:ahyp="http://schemas.microsoft.com/office/drawing/2018/hyperlinkcolor" xmlns:p15="http://schemas.microsoft.com/office/powerpoint/2012/main" xmlns:p14="http://schemas.microsoft.com/office/powerpoint/2010/main" xmlns:com="http://schemas.openxmlformats.org/drawingml/2006/compatibility" xmlns:pvml="urn:schemas-microsoft-com:office:powerpoint" xmlns:v="urn:schemas-microsoft-com:vml" xmlns:o="urn:schemas-microsoft-com:office:office" xmlns:dgm="http://schemas.openxmlformats.org/drawingml/2006/diagram" xmlns:c="http://schemas.openxmlformats.org/drawingml/2006/chart" xmlns:mv="urn:schemas-microsoft-com:mac:vml" xmlns:mc="http://schemas.openxmlformats.org/markup-compatibility/2006" xmlns="" r:id="rId8" roundtripDataSignature="AMtx7mi553m8NdOJu3RJVRvvSDH2Dnf3KQ=="/>
     </p:ext>
   </p:extLst>
 </p:presentation>
@@ -706,8 +706,8 @@
         </p:nvSpPr>
         <p:spPr>
           <a:xfrm>
-            <a:off x="171450" y="1143000"/>
-            <a:ext cx="6515100" cy="3086100"/>
+            <a:off x="2271713" y="1143000"/>
+            <a:ext cx="2314575" cy="3086100"/>
           </a:xfrm>
           <a:custGeom>
             <a:avLst/>
@@ -1481,8 +1481,8 @@
         </p:nvSpPr>
         <p:spPr>
           <a:xfrm>
-            <a:off x="171450" y="1143000"/>
-            <a:ext cx="6515100" cy="3086100"/>
+            <a:off x="2271713" y="1143000"/>
+            <a:ext cx="2314575" cy="3086100"/>
           </a:xfrm>
           <a:custGeom>
             <a:avLst/>
@@ -1921,8 +1921,8 @@
         </p:nvSpPr>
         <p:spPr>
           <a:xfrm>
-            <a:off x="1709937" y="1060530"/>
-            <a:ext cx="10259616" cy="2256061"/>
+            <a:off x="857251" y="1496486"/>
+            <a:ext cx="5143500" cy="3183467"/>
           </a:xfrm>
           <a:prstGeom prst="rect">
             <a:avLst/>
@@ -1953,7 +1953,7 @@
               <a:buSzPts val="6142"/>
               <a:buFont typeface="Play"/>
               <a:buNone/>
-              <a:defRPr sz="7370"/>
+              <a:defRPr sz="3695"/>
             </a:lvl1pPr>
             <a:lvl2pPr lvl="1">
               <a:spcBef>
@@ -2061,8 +2061,8 @@
         </p:nvSpPr>
         <p:spPr>
           <a:xfrm>
-            <a:off x="1709937" y="3403595"/>
-            <a:ext cx="10259616" cy="1564541"/>
+            <a:off x="857251" y="4802722"/>
+            <a:ext cx="5143500" cy="2207682"/>
           </a:xfrm>
           <a:prstGeom prst="rect">
             <a:avLst/>
@@ -2082,7 +2082,7 @@
                 <a:spcPct val="90000"/>
               </a:lnSpc>
               <a:spcBef>
-                <a:spcPts val="1229"/>
+                <a:spcPts val="616"/>
               </a:spcBef>
               <a:spcAft>
                 <a:spcPts val="0"/>
@@ -2092,14 +2092,14 @@
               </a:buClr>
               <a:buSzPts val="2457"/>
               <a:buNone/>
-              <a:defRPr sz="2948"/>
+              <a:defRPr sz="1478"/>
             </a:lvl1pPr>
             <a:lvl2pPr lvl="1" algn="ctr">
               <a:lnSpc>
                 <a:spcPct val="90000"/>
               </a:lnSpc>
               <a:spcBef>
-                <a:spcPts val="614"/>
+                <a:spcPts val="308"/>
               </a:spcBef>
               <a:spcAft>
                 <a:spcPts val="0"/>
@@ -2109,14 +2109,14 @@
               </a:buClr>
               <a:buSzPts val="2047"/>
               <a:buNone/>
-              <a:defRPr sz="2456"/>
+              <a:defRPr sz="1231"/>
             </a:lvl2pPr>
             <a:lvl3pPr lvl="2" algn="ctr">
               <a:lnSpc>
                 <a:spcPct val="90000"/>
               </a:lnSpc>
               <a:spcBef>
-                <a:spcPts val="614"/>
+                <a:spcPts val="308"/>
               </a:spcBef>
               <a:spcAft>
                 <a:spcPts val="0"/>
@@ -2126,14 +2126,14 @@
               </a:buClr>
               <a:buSzPts val="1842"/>
               <a:buNone/>
-              <a:defRPr sz="2210"/>
+              <a:defRPr sz="1108"/>
             </a:lvl3pPr>
             <a:lvl4pPr lvl="3" algn="ctr">
               <a:lnSpc>
                 <a:spcPct val="90000"/>
               </a:lnSpc>
               <a:spcBef>
-                <a:spcPts val="614"/>
+                <a:spcPts val="308"/>
               </a:spcBef>
               <a:spcAft>
                 <a:spcPts val="0"/>
@@ -2143,14 +2143,14 @@
               </a:buClr>
               <a:buSzPts val="1638"/>
               <a:buNone/>
-              <a:defRPr sz="1965"/>
+              <a:defRPr sz="985"/>
             </a:lvl4pPr>
             <a:lvl5pPr lvl="4" algn="ctr">
               <a:lnSpc>
                 <a:spcPct val="90000"/>
               </a:lnSpc>
               <a:spcBef>
-                <a:spcPts val="614"/>
+                <a:spcPts val="308"/>
               </a:spcBef>
               <a:spcAft>
                 <a:spcPts val="0"/>
@@ -2160,14 +2160,14 @@
               </a:buClr>
               <a:buSzPts val="1638"/>
               <a:buNone/>
-              <a:defRPr sz="1965"/>
+              <a:defRPr sz="985"/>
             </a:lvl5pPr>
             <a:lvl6pPr lvl="5" algn="ctr">
               <a:lnSpc>
                 <a:spcPct val="90000"/>
               </a:lnSpc>
               <a:spcBef>
-                <a:spcPts val="614"/>
+                <a:spcPts val="308"/>
               </a:spcBef>
               <a:spcAft>
                 <a:spcPts val="0"/>
@@ -2177,14 +2177,14 @@
               </a:buClr>
               <a:buSzPts val="1638"/>
               <a:buNone/>
-              <a:defRPr sz="1965"/>
+              <a:defRPr sz="985"/>
             </a:lvl6pPr>
             <a:lvl7pPr lvl="6" algn="ctr">
               <a:lnSpc>
                 <a:spcPct val="90000"/>
               </a:lnSpc>
               <a:spcBef>
-                <a:spcPts val="614"/>
+                <a:spcPts val="308"/>
               </a:spcBef>
               <a:spcAft>
                 <a:spcPts val="0"/>
@@ -2194,14 +2194,14 @@
               </a:buClr>
               <a:buSzPts val="1638"/>
               <a:buNone/>
-              <a:defRPr sz="1965"/>
+              <a:defRPr sz="985"/>
             </a:lvl7pPr>
             <a:lvl8pPr lvl="7" algn="ctr">
               <a:lnSpc>
                 <a:spcPct val="90000"/>
               </a:lnSpc>
               <a:spcBef>
-                <a:spcPts val="614"/>
+                <a:spcPts val="308"/>
               </a:spcBef>
               <a:spcAft>
                 <a:spcPts val="0"/>
@@ -2211,14 +2211,14 @@
               </a:buClr>
               <a:buSzPts val="1638"/>
               <a:buNone/>
-              <a:defRPr sz="1965"/>
+              <a:defRPr sz="985"/>
             </a:lvl8pPr>
             <a:lvl9pPr lvl="8" algn="ctr">
               <a:lnSpc>
                 <a:spcPct val="90000"/>
               </a:lnSpc>
               <a:spcBef>
-                <a:spcPts val="614"/>
+                <a:spcPts val="308"/>
               </a:spcBef>
               <a:spcAft>
                 <a:spcPts val="0"/>
@@ -2228,7 +2228,7 @@
               </a:buClr>
               <a:buSzPts val="1638"/>
               <a:buNone/>
-              <a:defRPr sz="1965"/>
+              <a:defRPr sz="985"/>
             </a:lvl9pPr>
           </a:lstStyle>
           <a:p>
@@ -2248,8 +2248,8 @@
         </p:nvSpPr>
         <p:spPr>
           <a:xfrm>
-            <a:off x="940466" y="6006165"/>
-            <a:ext cx="3077885" cy="345009"/>
+            <a:off x="471488" y="8475138"/>
+            <a:ext cx="1543050" cy="486833"/>
           </a:xfrm>
           <a:prstGeom prst="rect">
             <a:avLst/>
@@ -2381,8 +2381,8 @@
         </p:nvSpPr>
         <p:spPr>
           <a:xfrm>
-            <a:off x="4531331" y="6006165"/>
-            <a:ext cx="4616826" cy="345009"/>
+            <a:off x="2271713" y="8475138"/>
+            <a:ext cx="2314574" cy="486833"/>
           </a:xfrm>
           <a:prstGeom prst="rect">
             <a:avLst/>
@@ -2514,8 +2514,8 @@
         </p:nvSpPr>
         <p:spPr>
           <a:xfrm>
-            <a:off x="9661140" y="6006165"/>
-            <a:ext cx="3077885" cy="345009"/>
+            <a:off x="4843464" y="8475138"/>
+            <a:ext cx="1543050" cy="486833"/>
           </a:xfrm>
           <a:prstGeom prst="rect">
             <a:avLst/>
@@ -2641,8 +2641,8 @@
         </p:nvSpPr>
         <p:spPr>
           <a:xfrm>
-            <a:off x="940467" y="345014"/>
-            <a:ext cx="11798558" cy="1252533"/>
+            <a:off x="471489" y="486840"/>
+            <a:ext cx="5915025" cy="1767416"/>
           </a:xfrm>
           <a:prstGeom prst="rect">
             <a:avLst/>
@@ -2780,8 +2780,8 @@
         </p:nvSpPr>
         <p:spPr>
           <a:xfrm rot="5400000">
-            <a:off x="4783938" y="-2118424"/>
-            <a:ext cx="4111612" cy="11798558"/>
+            <a:off x="528108" y="2377550"/>
+            <a:ext cx="5801785" cy="5915025"/>
           </a:xfrm>
           <a:prstGeom prst="rect">
             <a:avLst/>
@@ -2796,12 +2796,12 @@
             <a:normAutofit/>
           </a:bodyPr>
           <a:lstStyle>
-            <a:lvl1pPr marL="548594" lvl="0" indent="-411446" algn="l">
-              <a:lnSpc>
-                <a:spcPct val="90000"/>
-              </a:lnSpc>
-              <a:spcBef>
-                <a:spcPts val="1229"/>
+            <a:lvl1pPr marL="275010" lvl="0" indent="-206258" algn="l">
+              <a:lnSpc>
+                <a:spcPct val="90000"/>
+              </a:lnSpc>
+              <a:spcBef>
+                <a:spcPts val="616"/>
               </a:spcBef>
               <a:spcAft>
                 <a:spcPts val="0"/>
@@ -2813,12 +2813,12 @@
               <a:buChar char="•"/>
               <a:defRPr/>
             </a:lvl1pPr>
-            <a:lvl2pPr marL="1097189" lvl="1" indent="-411446" algn="l">
-              <a:lnSpc>
-                <a:spcPct val="90000"/>
-              </a:lnSpc>
-              <a:spcBef>
-                <a:spcPts val="614"/>
+            <a:lvl2pPr marL="550021" lvl="1" indent="-206258" algn="l">
+              <a:lnSpc>
+                <a:spcPct val="90000"/>
+              </a:lnSpc>
+              <a:spcBef>
+                <a:spcPts val="308"/>
               </a:spcBef>
               <a:spcAft>
                 <a:spcPts val="0"/>
@@ -2830,12 +2830,12 @@
               <a:buChar char="•"/>
               <a:defRPr/>
             </a:lvl2pPr>
-            <a:lvl3pPr marL="1645783" lvl="2" indent="-411446" algn="l">
-              <a:lnSpc>
-                <a:spcPct val="90000"/>
-              </a:lnSpc>
-              <a:spcBef>
-                <a:spcPts val="614"/>
+            <a:lvl3pPr marL="825031" lvl="2" indent="-206258" algn="l">
+              <a:lnSpc>
+                <a:spcPct val="90000"/>
+              </a:lnSpc>
+              <a:spcBef>
+                <a:spcPts val="308"/>
               </a:spcBef>
               <a:spcAft>
                 <a:spcPts val="0"/>
@@ -2847,12 +2847,12 @@
               <a:buChar char="•"/>
               <a:defRPr/>
             </a:lvl3pPr>
-            <a:lvl4pPr marL="2194377" lvl="3" indent="-411446" algn="l">
-              <a:lnSpc>
-                <a:spcPct val="90000"/>
-              </a:lnSpc>
-              <a:spcBef>
-                <a:spcPts val="614"/>
+            <a:lvl4pPr marL="1100041" lvl="3" indent="-206258" algn="l">
+              <a:lnSpc>
+                <a:spcPct val="90000"/>
+              </a:lnSpc>
+              <a:spcBef>
+                <a:spcPts val="308"/>
               </a:spcBef>
               <a:spcAft>
                 <a:spcPts val="0"/>
@@ -2864,12 +2864,12 @@
               <a:buChar char="•"/>
               <a:defRPr/>
             </a:lvl4pPr>
-            <a:lvl5pPr marL="2742971" lvl="4" indent="-411446" algn="l">
-              <a:lnSpc>
-                <a:spcPct val="90000"/>
-              </a:lnSpc>
-              <a:spcBef>
-                <a:spcPts val="614"/>
+            <a:lvl5pPr marL="1375051" lvl="4" indent="-206258" algn="l">
+              <a:lnSpc>
+                <a:spcPct val="90000"/>
+              </a:lnSpc>
+              <a:spcBef>
+                <a:spcPts val="308"/>
               </a:spcBef>
               <a:spcAft>
                 <a:spcPts val="0"/>
@@ -2881,12 +2881,12 @@
               <a:buChar char="•"/>
               <a:defRPr/>
             </a:lvl5pPr>
-            <a:lvl6pPr marL="3291566" lvl="5" indent="-411446" algn="l">
-              <a:lnSpc>
-                <a:spcPct val="90000"/>
-              </a:lnSpc>
-              <a:spcBef>
-                <a:spcPts val="614"/>
+            <a:lvl6pPr marL="1650062" lvl="5" indent="-206258" algn="l">
+              <a:lnSpc>
+                <a:spcPct val="90000"/>
+              </a:lnSpc>
+              <a:spcBef>
+                <a:spcPts val="308"/>
               </a:spcBef>
               <a:spcAft>
                 <a:spcPts val="0"/>
@@ -2898,12 +2898,12 @@
               <a:buChar char="•"/>
               <a:defRPr/>
             </a:lvl6pPr>
-            <a:lvl7pPr marL="3840160" lvl="6" indent="-411446" algn="l">
-              <a:lnSpc>
-                <a:spcPct val="90000"/>
-              </a:lnSpc>
-              <a:spcBef>
-                <a:spcPts val="614"/>
+            <a:lvl7pPr marL="1925072" lvl="6" indent="-206258" algn="l">
+              <a:lnSpc>
+                <a:spcPct val="90000"/>
+              </a:lnSpc>
+              <a:spcBef>
+                <a:spcPts val="308"/>
               </a:spcBef>
               <a:spcAft>
                 <a:spcPts val="0"/>
@@ -2915,12 +2915,12 @@
               <a:buChar char="•"/>
               <a:defRPr/>
             </a:lvl7pPr>
-            <a:lvl8pPr marL="4388754" lvl="7" indent="-411446" algn="l">
-              <a:lnSpc>
-                <a:spcPct val="90000"/>
-              </a:lnSpc>
-              <a:spcBef>
-                <a:spcPts val="614"/>
+            <a:lvl8pPr marL="2200082" lvl="7" indent="-206258" algn="l">
+              <a:lnSpc>
+                <a:spcPct val="90000"/>
+              </a:lnSpc>
+              <a:spcBef>
+                <a:spcPts val="308"/>
               </a:spcBef>
               <a:spcAft>
                 <a:spcPts val="0"/>
@@ -2932,12 +2932,12 @@
               <a:buChar char="•"/>
               <a:defRPr/>
             </a:lvl8pPr>
-            <a:lvl9pPr marL="4937349" lvl="8" indent="-411446" algn="l">
-              <a:lnSpc>
-                <a:spcPct val="90000"/>
-              </a:lnSpc>
-              <a:spcBef>
-                <a:spcPts val="614"/>
+            <a:lvl9pPr marL="2475093" lvl="8" indent="-206258" algn="l">
+              <a:lnSpc>
+                <a:spcPct val="90000"/>
+              </a:lnSpc>
+              <a:spcBef>
+                <a:spcPts val="308"/>
               </a:spcBef>
               <a:spcAft>
                 <a:spcPts val="0"/>
@@ -2967,8 +2967,8 @@
         </p:nvSpPr>
         <p:spPr>
           <a:xfrm>
-            <a:off x="940466" y="6006165"/>
-            <a:ext cx="3077885" cy="345009"/>
+            <a:off x="471488" y="8475138"/>
+            <a:ext cx="1543050" cy="486833"/>
           </a:xfrm>
           <a:prstGeom prst="rect">
             <a:avLst/>
@@ -3100,8 +3100,8 @@
         </p:nvSpPr>
         <p:spPr>
           <a:xfrm>
-            <a:off x="4531331" y="6006165"/>
-            <a:ext cx="4616826" cy="345009"/>
+            <a:off x="2271713" y="8475138"/>
+            <a:ext cx="2314574" cy="486833"/>
           </a:xfrm>
           <a:prstGeom prst="rect">
             <a:avLst/>
@@ -3233,8 +3233,8 @@
         </p:nvSpPr>
         <p:spPr>
           <a:xfrm>
-            <a:off x="9661140" y="6006165"/>
-            <a:ext cx="3077885" cy="345009"/>
+            <a:off x="4843464" y="8475138"/>
+            <a:ext cx="1543050" cy="486833"/>
           </a:xfrm>
           <a:prstGeom prst="rect">
             <a:avLst/>
@@ -3360,8 +3360,8 @@
         </p:nvSpPr>
         <p:spPr>
           <a:xfrm rot="5400000">
-            <a:off x="8518381" y="1616014"/>
-            <a:ext cx="5491649" cy="2949640"/>
+            <a:off x="1772577" y="3622014"/>
+            <a:ext cx="7749118" cy="1478756"/>
           </a:xfrm>
           <a:prstGeom prst="rect">
             <a:avLst/>
@@ -3499,8 +3499,8 @@
         </p:nvSpPr>
         <p:spPr>
           <a:xfrm rot="5400000">
-            <a:off x="2533605" y="-1248128"/>
-            <a:ext cx="5491649" cy="8677925"/>
+            <a:off x="-1227798" y="2186122"/>
+            <a:ext cx="7749118" cy="4350544"/>
           </a:xfrm>
           <a:prstGeom prst="rect">
             <a:avLst/>
@@ -3515,12 +3515,12 @@
             <a:normAutofit/>
           </a:bodyPr>
           <a:lstStyle>
-            <a:lvl1pPr marL="548594" lvl="0" indent="-411446" algn="l">
-              <a:lnSpc>
-                <a:spcPct val="90000"/>
-              </a:lnSpc>
-              <a:spcBef>
-                <a:spcPts val="1229"/>
+            <a:lvl1pPr marL="275010" lvl="0" indent="-206258" algn="l">
+              <a:lnSpc>
+                <a:spcPct val="90000"/>
+              </a:lnSpc>
+              <a:spcBef>
+                <a:spcPts val="616"/>
               </a:spcBef>
               <a:spcAft>
                 <a:spcPts val="0"/>
@@ -3532,12 +3532,12 @@
               <a:buChar char="•"/>
               <a:defRPr/>
             </a:lvl1pPr>
-            <a:lvl2pPr marL="1097189" lvl="1" indent="-411446" algn="l">
-              <a:lnSpc>
-                <a:spcPct val="90000"/>
-              </a:lnSpc>
-              <a:spcBef>
-                <a:spcPts val="614"/>
+            <a:lvl2pPr marL="550021" lvl="1" indent="-206258" algn="l">
+              <a:lnSpc>
+                <a:spcPct val="90000"/>
+              </a:lnSpc>
+              <a:spcBef>
+                <a:spcPts val="308"/>
               </a:spcBef>
               <a:spcAft>
                 <a:spcPts val="0"/>
@@ -3549,12 +3549,12 @@
               <a:buChar char="•"/>
               <a:defRPr/>
             </a:lvl2pPr>
-            <a:lvl3pPr marL="1645783" lvl="2" indent="-411446" algn="l">
-              <a:lnSpc>
-                <a:spcPct val="90000"/>
-              </a:lnSpc>
-              <a:spcBef>
-                <a:spcPts val="614"/>
+            <a:lvl3pPr marL="825031" lvl="2" indent="-206258" algn="l">
+              <a:lnSpc>
+                <a:spcPct val="90000"/>
+              </a:lnSpc>
+              <a:spcBef>
+                <a:spcPts val="308"/>
               </a:spcBef>
               <a:spcAft>
                 <a:spcPts val="0"/>
@@ -3566,12 +3566,12 @@
               <a:buChar char="•"/>
               <a:defRPr/>
             </a:lvl3pPr>
-            <a:lvl4pPr marL="2194377" lvl="3" indent="-411446" algn="l">
-              <a:lnSpc>
-                <a:spcPct val="90000"/>
-              </a:lnSpc>
-              <a:spcBef>
-                <a:spcPts val="614"/>
+            <a:lvl4pPr marL="1100041" lvl="3" indent="-206258" algn="l">
+              <a:lnSpc>
+                <a:spcPct val="90000"/>
+              </a:lnSpc>
+              <a:spcBef>
+                <a:spcPts val="308"/>
               </a:spcBef>
               <a:spcAft>
                 <a:spcPts val="0"/>
@@ -3583,12 +3583,12 @@
               <a:buChar char="•"/>
               <a:defRPr/>
             </a:lvl4pPr>
-            <a:lvl5pPr marL="2742971" lvl="4" indent="-411446" algn="l">
-              <a:lnSpc>
-                <a:spcPct val="90000"/>
-              </a:lnSpc>
-              <a:spcBef>
-                <a:spcPts val="614"/>
+            <a:lvl5pPr marL="1375051" lvl="4" indent="-206258" algn="l">
+              <a:lnSpc>
+                <a:spcPct val="90000"/>
+              </a:lnSpc>
+              <a:spcBef>
+                <a:spcPts val="308"/>
               </a:spcBef>
               <a:spcAft>
                 <a:spcPts val="0"/>
@@ -3600,12 +3600,12 @@
               <a:buChar char="•"/>
               <a:defRPr/>
             </a:lvl5pPr>
-            <a:lvl6pPr marL="3291566" lvl="5" indent="-411446" algn="l">
-              <a:lnSpc>
-                <a:spcPct val="90000"/>
-              </a:lnSpc>
-              <a:spcBef>
-                <a:spcPts val="614"/>
+            <a:lvl6pPr marL="1650062" lvl="5" indent="-206258" algn="l">
+              <a:lnSpc>
+                <a:spcPct val="90000"/>
+              </a:lnSpc>
+              <a:spcBef>
+                <a:spcPts val="308"/>
               </a:spcBef>
               <a:spcAft>
                 <a:spcPts val="0"/>
@@ -3617,12 +3617,12 @@
               <a:buChar char="•"/>
               <a:defRPr/>
             </a:lvl6pPr>
-            <a:lvl7pPr marL="3840160" lvl="6" indent="-411446" algn="l">
-              <a:lnSpc>
-                <a:spcPct val="90000"/>
-              </a:lnSpc>
-              <a:spcBef>
-                <a:spcPts val="614"/>
+            <a:lvl7pPr marL="1925072" lvl="6" indent="-206258" algn="l">
+              <a:lnSpc>
+                <a:spcPct val="90000"/>
+              </a:lnSpc>
+              <a:spcBef>
+                <a:spcPts val="308"/>
               </a:spcBef>
               <a:spcAft>
                 <a:spcPts val="0"/>
@@ -3634,12 +3634,12 @@
               <a:buChar char="•"/>
               <a:defRPr/>
             </a:lvl7pPr>
-            <a:lvl8pPr marL="4388754" lvl="7" indent="-411446" algn="l">
-              <a:lnSpc>
-                <a:spcPct val="90000"/>
-              </a:lnSpc>
-              <a:spcBef>
-                <a:spcPts val="614"/>
+            <a:lvl8pPr marL="2200082" lvl="7" indent="-206258" algn="l">
+              <a:lnSpc>
+                <a:spcPct val="90000"/>
+              </a:lnSpc>
+              <a:spcBef>
+                <a:spcPts val="308"/>
               </a:spcBef>
               <a:spcAft>
                 <a:spcPts val="0"/>
@@ -3651,12 +3651,12 @@
               <a:buChar char="•"/>
               <a:defRPr/>
             </a:lvl8pPr>
-            <a:lvl9pPr marL="4937349" lvl="8" indent="-411446" algn="l">
-              <a:lnSpc>
-                <a:spcPct val="90000"/>
-              </a:lnSpc>
-              <a:spcBef>
-                <a:spcPts val="614"/>
+            <a:lvl9pPr marL="2475093" lvl="8" indent="-206258" algn="l">
+              <a:lnSpc>
+                <a:spcPct val="90000"/>
+              </a:lnSpc>
+              <a:spcBef>
+                <a:spcPts val="308"/>
               </a:spcBef>
               <a:spcAft>
                 <a:spcPts val="0"/>
@@ -3686,8 +3686,8 @@
         </p:nvSpPr>
         <p:spPr>
           <a:xfrm>
-            <a:off x="940466" y="6006165"/>
-            <a:ext cx="3077885" cy="345009"/>
+            <a:off x="471488" y="8475138"/>
+            <a:ext cx="1543050" cy="486833"/>
           </a:xfrm>
           <a:prstGeom prst="rect">
             <a:avLst/>
@@ -3819,8 +3819,8 @@
         </p:nvSpPr>
         <p:spPr>
           <a:xfrm>
-            <a:off x="4531331" y="6006165"/>
-            <a:ext cx="4616826" cy="345009"/>
+            <a:off x="2271713" y="8475138"/>
+            <a:ext cx="2314574" cy="486833"/>
           </a:xfrm>
           <a:prstGeom prst="rect">
             <a:avLst/>
@@ -3952,8 +3952,8 @@
         </p:nvSpPr>
         <p:spPr>
           <a:xfrm>
-            <a:off x="9661140" y="6006165"/>
-            <a:ext cx="3077885" cy="345009"/>
+            <a:off x="4843464" y="8475138"/>
+            <a:ext cx="1543050" cy="486833"/>
           </a:xfrm>
           <a:prstGeom prst="rect">
             <a:avLst/>
@@ -4079,8 +4079,8 @@
         </p:nvSpPr>
         <p:spPr>
           <a:xfrm>
-            <a:off x="940467" y="345014"/>
-            <a:ext cx="11798558" cy="1252533"/>
+            <a:off x="471489" y="486840"/>
+            <a:ext cx="5915025" cy="1767416"/>
           </a:xfrm>
           <a:prstGeom prst="rect">
             <a:avLst/>
@@ -4218,8 +4218,8 @@
         </p:nvSpPr>
         <p:spPr>
           <a:xfrm>
-            <a:off x="940467" y="1725048"/>
-            <a:ext cx="11798558" cy="4111612"/>
+            <a:off x="471489" y="2434169"/>
+            <a:ext cx="5915025" cy="5801785"/>
           </a:xfrm>
           <a:prstGeom prst="rect">
             <a:avLst/>
@@ -4234,12 +4234,12 @@
             <a:normAutofit/>
           </a:bodyPr>
           <a:lstStyle>
-            <a:lvl1pPr marL="548594" lvl="0" indent="-411446" algn="l">
-              <a:lnSpc>
-                <a:spcPct val="90000"/>
-              </a:lnSpc>
-              <a:spcBef>
-                <a:spcPts val="1229"/>
+            <a:lvl1pPr marL="275010" lvl="0" indent="-206258" algn="l">
+              <a:lnSpc>
+                <a:spcPct val="90000"/>
+              </a:lnSpc>
+              <a:spcBef>
+                <a:spcPts val="616"/>
               </a:spcBef>
               <a:spcAft>
                 <a:spcPts val="0"/>
@@ -4251,12 +4251,12 @@
               <a:buChar char="•"/>
               <a:defRPr/>
             </a:lvl1pPr>
-            <a:lvl2pPr marL="1097189" lvl="1" indent="-411446" algn="l">
-              <a:lnSpc>
-                <a:spcPct val="90000"/>
-              </a:lnSpc>
-              <a:spcBef>
-                <a:spcPts val="614"/>
+            <a:lvl2pPr marL="550021" lvl="1" indent="-206258" algn="l">
+              <a:lnSpc>
+                <a:spcPct val="90000"/>
+              </a:lnSpc>
+              <a:spcBef>
+                <a:spcPts val="308"/>
               </a:spcBef>
               <a:spcAft>
                 <a:spcPts val="0"/>
@@ -4268,12 +4268,12 @@
               <a:buChar char="•"/>
               <a:defRPr/>
             </a:lvl2pPr>
-            <a:lvl3pPr marL="1645783" lvl="2" indent="-411446" algn="l">
-              <a:lnSpc>
-                <a:spcPct val="90000"/>
-              </a:lnSpc>
-              <a:spcBef>
-                <a:spcPts val="614"/>
+            <a:lvl3pPr marL="825031" lvl="2" indent="-206258" algn="l">
+              <a:lnSpc>
+                <a:spcPct val="90000"/>
+              </a:lnSpc>
+              <a:spcBef>
+                <a:spcPts val="308"/>
               </a:spcBef>
               <a:spcAft>
                 <a:spcPts val="0"/>
@@ -4285,12 +4285,12 @@
               <a:buChar char="•"/>
               <a:defRPr/>
             </a:lvl3pPr>
-            <a:lvl4pPr marL="2194377" lvl="3" indent="-411446" algn="l">
-              <a:lnSpc>
-                <a:spcPct val="90000"/>
-              </a:lnSpc>
-              <a:spcBef>
-                <a:spcPts val="614"/>
+            <a:lvl4pPr marL="1100041" lvl="3" indent="-206258" algn="l">
+              <a:lnSpc>
+                <a:spcPct val="90000"/>
+              </a:lnSpc>
+              <a:spcBef>
+                <a:spcPts val="308"/>
               </a:spcBef>
               <a:spcAft>
                 <a:spcPts val="0"/>
@@ -4302,12 +4302,12 @@
               <a:buChar char="•"/>
               <a:defRPr/>
             </a:lvl4pPr>
-            <a:lvl5pPr marL="2742971" lvl="4" indent="-411446" algn="l">
-              <a:lnSpc>
-                <a:spcPct val="90000"/>
-              </a:lnSpc>
-              <a:spcBef>
-                <a:spcPts val="614"/>
+            <a:lvl5pPr marL="1375051" lvl="4" indent="-206258" algn="l">
+              <a:lnSpc>
+                <a:spcPct val="90000"/>
+              </a:lnSpc>
+              <a:spcBef>
+                <a:spcPts val="308"/>
               </a:spcBef>
               <a:spcAft>
                 <a:spcPts val="0"/>
@@ -4319,12 +4319,12 @@
               <a:buChar char="•"/>
               <a:defRPr/>
             </a:lvl5pPr>
-            <a:lvl6pPr marL="3291566" lvl="5" indent="-411446" algn="l">
-              <a:lnSpc>
-                <a:spcPct val="90000"/>
-              </a:lnSpc>
-              <a:spcBef>
-                <a:spcPts val="614"/>
+            <a:lvl6pPr marL="1650062" lvl="5" indent="-206258" algn="l">
+              <a:lnSpc>
+                <a:spcPct val="90000"/>
+              </a:lnSpc>
+              <a:spcBef>
+                <a:spcPts val="308"/>
               </a:spcBef>
               <a:spcAft>
                 <a:spcPts val="0"/>
@@ -4336,12 +4336,12 @@
               <a:buChar char="•"/>
               <a:defRPr/>
             </a:lvl6pPr>
-            <a:lvl7pPr marL="3840160" lvl="6" indent="-411446" algn="l">
-              <a:lnSpc>
-                <a:spcPct val="90000"/>
-              </a:lnSpc>
-              <a:spcBef>
-                <a:spcPts val="614"/>
+            <a:lvl7pPr marL="1925072" lvl="6" indent="-206258" algn="l">
+              <a:lnSpc>
+                <a:spcPct val="90000"/>
+              </a:lnSpc>
+              <a:spcBef>
+                <a:spcPts val="308"/>
               </a:spcBef>
               <a:spcAft>
                 <a:spcPts val="0"/>
@@ -4353,12 +4353,12 @@
               <a:buChar char="•"/>
               <a:defRPr/>
             </a:lvl7pPr>
-            <a:lvl8pPr marL="4388754" lvl="7" indent="-411446" algn="l">
-              <a:lnSpc>
-                <a:spcPct val="90000"/>
-              </a:lnSpc>
-              <a:spcBef>
-                <a:spcPts val="614"/>
+            <a:lvl8pPr marL="2200082" lvl="7" indent="-206258" algn="l">
+              <a:lnSpc>
+                <a:spcPct val="90000"/>
+              </a:lnSpc>
+              <a:spcBef>
+                <a:spcPts val="308"/>
               </a:spcBef>
               <a:spcAft>
                 <a:spcPts val="0"/>
@@ -4370,12 +4370,12 @@
               <a:buChar char="•"/>
               <a:defRPr/>
             </a:lvl8pPr>
-            <a:lvl9pPr marL="4937349" lvl="8" indent="-411446" algn="l">
-              <a:lnSpc>
-                <a:spcPct val="90000"/>
-              </a:lnSpc>
-              <a:spcBef>
-                <a:spcPts val="614"/>
+            <a:lvl9pPr marL="2475093" lvl="8" indent="-206258" algn="l">
+              <a:lnSpc>
+                <a:spcPct val="90000"/>
+              </a:lnSpc>
+              <a:spcBef>
+                <a:spcPts val="308"/>
               </a:spcBef>
               <a:spcAft>
                 <a:spcPts val="0"/>
@@ -4405,8 +4405,8 @@
         </p:nvSpPr>
         <p:spPr>
           <a:xfrm>
-            <a:off x="940466" y="6006165"/>
-            <a:ext cx="3077885" cy="345009"/>
+            <a:off x="471488" y="8475138"/>
+            <a:ext cx="1543050" cy="486833"/>
           </a:xfrm>
           <a:prstGeom prst="rect">
             <a:avLst/>
@@ -4538,8 +4538,8 @@
         </p:nvSpPr>
         <p:spPr>
           <a:xfrm>
-            <a:off x="4531331" y="6006165"/>
-            <a:ext cx="4616826" cy="345009"/>
+            <a:off x="2271713" y="8475138"/>
+            <a:ext cx="2314574" cy="486833"/>
           </a:xfrm>
           <a:prstGeom prst="rect">
             <a:avLst/>
@@ -4671,8 +4671,8 @@
         </p:nvSpPr>
         <p:spPr>
           <a:xfrm>
-            <a:off x="9661140" y="6006165"/>
-            <a:ext cx="3077885" cy="345009"/>
+            <a:off x="4843464" y="8475138"/>
+            <a:ext cx="1543050" cy="486833"/>
           </a:xfrm>
           <a:prstGeom prst="rect">
             <a:avLst/>
@@ -4798,8 +4798,8 @@
         </p:nvSpPr>
         <p:spPr>
           <a:xfrm>
-            <a:off x="933343" y="1615546"/>
-            <a:ext cx="11798558" cy="2695573"/>
+            <a:off x="467917" y="2279654"/>
+            <a:ext cx="5915025" cy="3803650"/>
           </a:xfrm>
           <a:prstGeom prst="rect">
             <a:avLst/>
@@ -4830,7 +4830,7 @@
               <a:buSzPts val="6142"/>
               <a:buFont typeface="Play"/>
               <a:buNone/>
-              <a:defRPr sz="7370"/>
+              <a:defRPr sz="3695"/>
             </a:lvl1pPr>
             <a:lvl2pPr lvl="1">
               <a:spcBef>
@@ -4938,8 +4938,8 @@
         </p:nvSpPr>
         <p:spPr>
           <a:xfrm>
-            <a:off x="933343" y="4336619"/>
-            <a:ext cx="11798558" cy="1417539"/>
+            <a:off x="467917" y="6119287"/>
+            <a:ext cx="5915025" cy="2000251"/>
           </a:xfrm>
           <a:prstGeom prst="rect">
             <a:avLst/>
@@ -4954,12 +4954,12 @@
             <a:normAutofit/>
           </a:bodyPr>
           <a:lstStyle>
-            <a:lvl1pPr marL="548594" lvl="0" indent="-274297" algn="l">
-              <a:lnSpc>
-                <a:spcPct val="90000"/>
-              </a:lnSpc>
-              <a:spcBef>
-                <a:spcPts val="1229"/>
+            <a:lvl1pPr marL="275010" lvl="0" indent="-137505" algn="l">
+              <a:lnSpc>
+                <a:spcPct val="90000"/>
+              </a:lnSpc>
+              <a:spcBef>
+                <a:spcPts val="616"/>
               </a:spcBef>
               <a:spcAft>
                 <a:spcPts val="0"/>
@@ -4969,18 +4969,18 @@
               </a:buClr>
               <a:buSzPts val="2457"/>
               <a:buNone/>
-              <a:defRPr sz="2948">
+              <a:defRPr sz="1478">
                 <a:solidFill>
                   <a:srgbClr val="757575"/>
                 </a:solidFill>
               </a:defRPr>
             </a:lvl1pPr>
-            <a:lvl2pPr marL="1097189" lvl="1" indent="-274297" algn="l">
-              <a:lnSpc>
-                <a:spcPct val="90000"/>
-              </a:lnSpc>
-              <a:spcBef>
-                <a:spcPts val="614"/>
+            <a:lvl2pPr marL="550021" lvl="1" indent="-137505" algn="l">
+              <a:lnSpc>
+                <a:spcPct val="90000"/>
+              </a:lnSpc>
+              <a:spcBef>
+                <a:spcPts val="308"/>
               </a:spcBef>
               <a:spcAft>
                 <a:spcPts val="0"/>
@@ -4990,18 +4990,18 @@
               </a:buClr>
               <a:buSzPts val="2047"/>
               <a:buNone/>
-              <a:defRPr sz="2456">
+              <a:defRPr sz="1231">
                 <a:solidFill>
                   <a:srgbClr val="757575"/>
                 </a:solidFill>
               </a:defRPr>
             </a:lvl2pPr>
-            <a:lvl3pPr marL="1645783" lvl="2" indent="-274297" algn="l">
-              <a:lnSpc>
-                <a:spcPct val="90000"/>
-              </a:lnSpc>
-              <a:spcBef>
-                <a:spcPts val="614"/>
+            <a:lvl3pPr marL="825031" lvl="2" indent="-137505" algn="l">
+              <a:lnSpc>
+                <a:spcPct val="90000"/>
+              </a:lnSpc>
+              <a:spcBef>
+                <a:spcPts val="308"/>
               </a:spcBef>
               <a:spcAft>
                 <a:spcPts val="0"/>
@@ -5011,18 +5011,18 @@
               </a:buClr>
               <a:buSzPts val="1842"/>
               <a:buNone/>
-              <a:defRPr sz="2210">
+              <a:defRPr sz="1108">
                 <a:solidFill>
                   <a:srgbClr val="757575"/>
                 </a:solidFill>
               </a:defRPr>
             </a:lvl3pPr>
-            <a:lvl4pPr marL="2194377" lvl="3" indent="-274297" algn="l">
-              <a:lnSpc>
-                <a:spcPct val="90000"/>
-              </a:lnSpc>
-              <a:spcBef>
-                <a:spcPts val="614"/>
+            <a:lvl4pPr marL="1100041" lvl="3" indent="-137505" algn="l">
+              <a:lnSpc>
+                <a:spcPct val="90000"/>
+              </a:lnSpc>
+              <a:spcBef>
+                <a:spcPts val="308"/>
               </a:spcBef>
               <a:spcAft>
                 <a:spcPts val="0"/>
@@ -5032,18 +5032,18 @@
               </a:buClr>
               <a:buSzPts val="1638"/>
               <a:buNone/>
-              <a:defRPr sz="1965">
+              <a:defRPr sz="985">
                 <a:solidFill>
                   <a:srgbClr val="757575"/>
                 </a:solidFill>
               </a:defRPr>
             </a:lvl4pPr>
-            <a:lvl5pPr marL="2742971" lvl="4" indent="-274297" algn="l">
-              <a:lnSpc>
-                <a:spcPct val="90000"/>
-              </a:lnSpc>
-              <a:spcBef>
-                <a:spcPts val="614"/>
+            <a:lvl5pPr marL="1375051" lvl="4" indent="-137505" algn="l">
+              <a:lnSpc>
+                <a:spcPct val="90000"/>
+              </a:lnSpc>
+              <a:spcBef>
+                <a:spcPts val="308"/>
               </a:spcBef>
               <a:spcAft>
                 <a:spcPts val="0"/>
@@ -5053,18 +5053,18 @@
               </a:buClr>
               <a:buSzPts val="1638"/>
               <a:buNone/>
-              <a:defRPr sz="1965">
+              <a:defRPr sz="985">
                 <a:solidFill>
                   <a:srgbClr val="757575"/>
                 </a:solidFill>
               </a:defRPr>
             </a:lvl5pPr>
-            <a:lvl6pPr marL="3291566" lvl="5" indent="-274297" algn="l">
-              <a:lnSpc>
-                <a:spcPct val="90000"/>
-              </a:lnSpc>
-              <a:spcBef>
-                <a:spcPts val="614"/>
+            <a:lvl6pPr marL="1650062" lvl="5" indent="-137505" algn="l">
+              <a:lnSpc>
+                <a:spcPct val="90000"/>
+              </a:lnSpc>
+              <a:spcBef>
+                <a:spcPts val="308"/>
               </a:spcBef>
               <a:spcAft>
                 <a:spcPts val="0"/>
@@ -5074,18 +5074,18 @@
               </a:buClr>
               <a:buSzPts val="1638"/>
               <a:buNone/>
-              <a:defRPr sz="1965">
+              <a:defRPr sz="985">
                 <a:solidFill>
                   <a:srgbClr val="757575"/>
                 </a:solidFill>
               </a:defRPr>
             </a:lvl6pPr>
-            <a:lvl7pPr marL="3840160" lvl="6" indent="-274297" algn="l">
-              <a:lnSpc>
-                <a:spcPct val="90000"/>
-              </a:lnSpc>
-              <a:spcBef>
-                <a:spcPts val="614"/>
+            <a:lvl7pPr marL="1925072" lvl="6" indent="-137505" algn="l">
+              <a:lnSpc>
+                <a:spcPct val="90000"/>
+              </a:lnSpc>
+              <a:spcBef>
+                <a:spcPts val="308"/>
               </a:spcBef>
               <a:spcAft>
                 <a:spcPts val="0"/>
@@ -5095,18 +5095,18 @@
               </a:buClr>
               <a:buSzPts val="1638"/>
               <a:buNone/>
-              <a:defRPr sz="1965">
+              <a:defRPr sz="985">
                 <a:solidFill>
                   <a:srgbClr val="757575"/>
                 </a:solidFill>
               </a:defRPr>
             </a:lvl7pPr>
-            <a:lvl8pPr marL="4388754" lvl="7" indent="-274297" algn="l">
-              <a:lnSpc>
-                <a:spcPct val="90000"/>
-              </a:lnSpc>
-              <a:spcBef>
-                <a:spcPts val="614"/>
+            <a:lvl8pPr marL="2200082" lvl="7" indent="-137505" algn="l">
+              <a:lnSpc>
+                <a:spcPct val="90000"/>
+              </a:lnSpc>
+              <a:spcBef>
+                <a:spcPts val="308"/>
               </a:spcBef>
               <a:spcAft>
                 <a:spcPts val="0"/>
@@ -5116,18 +5116,18 @@
               </a:buClr>
               <a:buSzPts val="1638"/>
               <a:buNone/>
-              <a:defRPr sz="1965">
+              <a:defRPr sz="985">
                 <a:solidFill>
                   <a:srgbClr val="757575"/>
                 </a:solidFill>
               </a:defRPr>
             </a:lvl8pPr>
-            <a:lvl9pPr marL="4937349" lvl="8" indent="-274297" algn="l">
-              <a:lnSpc>
-                <a:spcPct val="90000"/>
-              </a:lnSpc>
-              <a:spcBef>
-                <a:spcPts val="614"/>
+            <a:lvl9pPr marL="2475093" lvl="8" indent="-137505" algn="l">
+              <a:lnSpc>
+                <a:spcPct val="90000"/>
+              </a:lnSpc>
+              <a:spcBef>
+                <a:spcPts val="308"/>
               </a:spcBef>
               <a:spcAft>
                 <a:spcPts val="0"/>
@@ -5137,7 +5137,7 @@
               </a:buClr>
               <a:buSzPts val="1638"/>
               <a:buNone/>
-              <a:defRPr sz="1965">
+              <a:defRPr sz="985">
                 <a:solidFill>
                   <a:srgbClr val="757575"/>
                 </a:solidFill>
@@ -5161,8 +5161,8 @@
         </p:nvSpPr>
         <p:spPr>
           <a:xfrm>
-            <a:off x="940466" y="6006165"/>
-            <a:ext cx="3077885" cy="345009"/>
+            <a:off x="471488" y="8475138"/>
+            <a:ext cx="1543050" cy="486833"/>
           </a:xfrm>
           <a:prstGeom prst="rect">
             <a:avLst/>
@@ -5294,8 +5294,8 @@
         </p:nvSpPr>
         <p:spPr>
           <a:xfrm>
-            <a:off x="4531331" y="6006165"/>
-            <a:ext cx="4616826" cy="345009"/>
+            <a:off x="2271713" y="8475138"/>
+            <a:ext cx="2314574" cy="486833"/>
           </a:xfrm>
           <a:prstGeom prst="rect">
             <a:avLst/>
@@ -5427,8 +5427,8 @@
         </p:nvSpPr>
         <p:spPr>
           <a:xfrm>
-            <a:off x="9661140" y="6006165"/>
-            <a:ext cx="3077885" cy="345009"/>
+            <a:off x="4843464" y="8475138"/>
+            <a:ext cx="1543050" cy="486833"/>
           </a:xfrm>
           <a:prstGeom prst="rect">
             <a:avLst/>
@@ -5554,8 +5554,8 @@
         </p:nvSpPr>
         <p:spPr>
           <a:xfrm>
-            <a:off x="940467" y="345014"/>
-            <a:ext cx="11798558" cy="1252533"/>
+            <a:off x="471489" y="486840"/>
+            <a:ext cx="5915025" cy="1767416"/>
           </a:xfrm>
           <a:prstGeom prst="rect">
             <a:avLst/>
@@ -5693,8 +5693,8 @@
         </p:nvSpPr>
         <p:spPr>
           <a:xfrm>
-            <a:off x="940466" y="1725048"/>
-            <a:ext cx="5813783" cy="4111612"/>
+            <a:off x="471489" y="2434169"/>
+            <a:ext cx="2914650" cy="5801785"/>
           </a:xfrm>
           <a:prstGeom prst="rect">
             <a:avLst/>
@@ -5709,12 +5709,12 @@
             <a:normAutofit/>
           </a:bodyPr>
           <a:lstStyle>
-            <a:lvl1pPr marL="548594" lvl="0" indent="-411446" algn="l">
-              <a:lnSpc>
-                <a:spcPct val="90000"/>
-              </a:lnSpc>
-              <a:spcBef>
-                <a:spcPts val="1229"/>
+            <a:lvl1pPr marL="275010" lvl="0" indent="-206258" algn="l">
+              <a:lnSpc>
+                <a:spcPct val="90000"/>
+              </a:lnSpc>
+              <a:spcBef>
+                <a:spcPts val="616"/>
               </a:spcBef>
               <a:spcAft>
                 <a:spcPts val="0"/>
@@ -5726,12 +5726,12 @@
               <a:buChar char="•"/>
               <a:defRPr/>
             </a:lvl1pPr>
-            <a:lvl2pPr marL="1097189" lvl="1" indent="-411446" algn="l">
-              <a:lnSpc>
-                <a:spcPct val="90000"/>
-              </a:lnSpc>
-              <a:spcBef>
-                <a:spcPts val="614"/>
+            <a:lvl2pPr marL="550021" lvl="1" indent="-206258" algn="l">
+              <a:lnSpc>
+                <a:spcPct val="90000"/>
+              </a:lnSpc>
+              <a:spcBef>
+                <a:spcPts val="308"/>
               </a:spcBef>
               <a:spcAft>
                 <a:spcPts val="0"/>
@@ -5743,12 +5743,12 @@
               <a:buChar char="•"/>
               <a:defRPr/>
             </a:lvl2pPr>
-            <a:lvl3pPr marL="1645783" lvl="2" indent="-411446" algn="l">
-              <a:lnSpc>
-                <a:spcPct val="90000"/>
-              </a:lnSpc>
-              <a:spcBef>
-                <a:spcPts val="614"/>
+            <a:lvl3pPr marL="825031" lvl="2" indent="-206258" algn="l">
+              <a:lnSpc>
+                <a:spcPct val="90000"/>
+              </a:lnSpc>
+              <a:spcBef>
+                <a:spcPts val="308"/>
               </a:spcBef>
               <a:spcAft>
                 <a:spcPts val="0"/>
@@ -5760,12 +5760,12 @@
               <a:buChar char="•"/>
               <a:defRPr/>
             </a:lvl3pPr>
-            <a:lvl4pPr marL="2194377" lvl="3" indent="-411446" algn="l">
-              <a:lnSpc>
-                <a:spcPct val="90000"/>
-              </a:lnSpc>
-              <a:spcBef>
-                <a:spcPts val="614"/>
+            <a:lvl4pPr marL="1100041" lvl="3" indent="-206258" algn="l">
+              <a:lnSpc>
+                <a:spcPct val="90000"/>
+              </a:lnSpc>
+              <a:spcBef>
+                <a:spcPts val="308"/>
               </a:spcBef>
               <a:spcAft>
                 <a:spcPts val="0"/>
@@ -5777,12 +5777,12 @@
               <a:buChar char="•"/>
               <a:defRPr/>
             </a:lvl4pPr>
-            <a:lvl5pPr marL="2742971" lvl="4" indent="-411446" algn="l">
-              <a:lnSpc>
-                <a:spcPct val="90000"/>
-              </a:lnSpc>
-              <a:spcBef>
-                <a:spcPts val="614"/>
+            <a:lvl5pPr marL="1375051" lvl="4" indent="-206258" algn="l">
+              <a:lnSpc>
+                <a:spcPct val="90000"/>
+              </a:lnSpc>
+              <a:spcBef>
+                <a:spcPts val="308"/>
               </a:spcBef>
               <a:spcAft>
                 <a:spcPts val="0"/>
@@ -5794,12 +5794,12 @@
               <a:buChar char="•"/>
               <a:defRPr/>
             </a:lvl5pPr>
-            <a:lvl6pPr marL="3291566" lvl="5" indent="-411446" algn="l">
-              <a:lnSpc>
-                <a:spcPct val="90000"/>
-              </a:lnSpc>
-              <a:spcBef>
-                <a:spcPts val="614"/>
+            <a:lvl6pPr marL="1650062" lvl="5" indent="-206258" algn="l">
+              <a:lnSpc>
+                <a:spcPct val="90000"/>
+              </a:lnSpc>
+              <a:spcBef>
+                <a:spcPts val="308"/>
               </a:spcBef>
               <a:spcAft>
                 <a:spcPts val="0"/>
@@ -5811,12 +5811,12 @@
               <a:buChar char="•"/>
               <a:defRPr/>
             </a:lvl6pPr>
-            <a:lvl7pPr marL="3840160" lvl="6" indent="-411446" algn="l">
-              <a:lnSpc>
-                <a:spcPct val="90000"/>
-              </a:lnSpc>
-              <a:spcBef>
-                <a:spcPts val="614"/>
+            <a:lvl7pPr marL="1925072" lvl="6" indent="-206258" algn="l">
+              <a:lnSpc>
+                <a:spcPct val="90000"/>
+              </a:lnSpc>
+              <a:spcBef>
+                <a:spcPts val="308"/>
               </a:spcBef>
               <a:spcAft>
                 <a:spcPts val="0"/>
@@ -5828,12 +5828,12 @@
               <a:buChar char="•"/>
               <a:defRPr/>
             </a:lvl7pPr>
-            <a:lvl8pPr marL="4388754" lvl="7" indent="-411446" algn="l">
-              <a:lnSpc>
-                <a:spcPct val="90000"/>
-              </a:lnSpc>
-              <a:spcBef>
-                <a:spcPts val="614"/>
+            <a:lvl8pPr marL="2200082" lvl="7" indent="-206258" algn="l">
+              <a:lnSpc>
+                <a:spcPct val="90000"/>
+              </a:lnSpc>
+              <a:spcBef>
+                <a:spcPts val="308"/>
               </a:spcBef>
               <a:spcAft>
                 <a:spcPts val="0"/>
@@ -5845,12 +5845,12 @@
               <a:buChar char="•"/>
               <a:defRPr/>
             </a:lvl8pPr>
-            <a:lvl9pPr marL="4937349" lvl="8" indent="-411446" algn="l">
-              <a:lnSpc>
-                <a:spcPct val="90000"/>
-              </a:lnSpc>
-              <a:spcBef>
-                <a:spcPts val="614"/>
+            <a:lvl9pPr marL="2475093" lvl="8" indent="-206258" algn="l">
+              <a:lnSpc>
+                <a:spcPct val="90000"/>
+              </a:lnSpc>
+              <a:spcBef>
+                <a:spcPts val="308"/>
               </a:spcBef>
               <a:spcAft>
                 <a:spcPts val="0"/>
@@ -5880,8 +5880,8 @@
         </p:nvSpPr>
         <p:spPr>
           <a:xfrm>
-            <a:off x="6925240" y="1725048"/>
-            <a:ext cx="5813783" cy="4111612"/>
+            <a:off x="3471863" y="2434169"/>
+            <a:ext cx="2914650" cy="5801785"/>
           </a:xfrm>
           <a:prstGeom prst="rect">
             <a:avLst/>
@@ -5896,12 +5896,12 @@
             <a:normAutofit/>
           </a:bodyPr>
           <a:lstStyle>
-            <a:lvl1pPr marL="548594" lvl="0" indent="-411446" algn="l">
-              <a:lnSpc>
-                <a:spcPct val="90000"/>
-              </a:lnSpc>
-              <a:spcBef>
-                <a:spcPts val="1229"/>
+            <a:lvl1pPr marL="275010" lvl="0" indent="-206258" algn="l">
+              <a:lnSpc>
+                <a:spcPct val="90000"/>
+              </a:lnSpc>
+              <a:spcBef>
+                <a:spcPts val="616"/>
               </a:spcBef>
               <a:spcAft>
                 <a:spcPts val="0"/>
@@ -5913,12 +5913,12 @@
               <a:buChar char="•"/>
               <a:defRPr/>
             </a:lvl1pPr>
-            <a:lvl2pPr marL="1097189" lvl="1" indent="-411446" algn="l">
-              <a:lnSpc>
-                <a:spcPct val="90000"/>
-              </a:lnSpc>
-              <a:spcBef>
-                <a:spcPts val="614"/>
+            <a:lvl2pPr marL="550021" lvl="1" indent="-206258" algn="l">
+              <a:lnSpc>
+                <a:spcPct val="90000"/>
+              </a:lnSpc>
+              <a:spcBef>
+                <a:spcPts val="308"/>
               </a:spcBef>
               <a:spcAft>
                 <a:spcPts val="0"/>
@@ -5930,12 +5930,12 @@
               <a:buChar char="•"/>
               <a:defRPr/>
             </a:lvl2pPr>
-            <a:lvl3pPr marL="1645783" lvl="2" indent="-411446" algn="l">
-              <a:lnSpc>
-                <a:spcPct val="90000"/>
-              </a:lnSpc>
-              <a:spcBef>
-                <a:spcPts val="614"/>
+            <a:lvl3pPr marL="825031" lvl="2" indent="-206258" algn="l">
+              <a:lnSpc>
+                <a:spcPct val="90000"/>
+              </a:lnSpc>
+              <a:spcBef>
+                <a:spcPts val="308"/>
               </a:spcBef>
               <a:spcAft>
                 <a:spcPts val="0"/>
@@ -5947,12 +5947,12 @@
               <a:buChar char="•"/>
               <a:defRPr/>
             </a:lvl3pPr>
-            <a:lvl4pPr marL="2194377" lvl="3" indent="-411446" algn="l">
-              <a:lnSpc>
-                <a:spcPct val="90000"/>
-              </a:lnSpc>
-              <a:spcBef>
-                <a:spcPts val="614"/>
+            <a:lvl4pPr marL="1100041" lvl="3" indent="-206258" algn="l">
+              <a:lnSpc>
+                <a:spcPct val="90000"/>
+              </a:lnSpc>
+              <a:spcBef>
+                <a:spcPts val="308"/>
               </a:spcBef>
               <a:spcAft>
                 <a:spcPts val="0"/>
@@ -5964,12 +5964,12 @@
               <a:buChar char="•"/>
               <a:defRPr/>
             </a:lvl4pPr>
-            <a:lvl5pPr marL="2742971" lvl="4" indent="-411446" algn="l">
-              <a:lnSpc>
-                <a:spcPct val="90000"/>
-              </a:lnSpc>
-              <a:spcBef>
-                <a:spcPts val="614"/>
+            <a:lvl5pPr marL="1375051" lvl="4" indent="-206258" algn="l">
+              <a:lnSpc>
+                <a:spcPct val="90000"/>
+              </a:lnSpc>
+              <a:spcBef>
+                <a:spcPts val="308"/>
               </a:spcBef>
               <a:spcAft>
                 <a:spcPts val="0"/>
@@ -5981,12 +5981,12 @@
               <a:buChar char="•"/>
               <a:defRPr/>
             </a:lvl5pPr>
-            <a:lvl6pPr marL="3291566" lvl="5" indent="-411446" algn="l">
-              <a:lnSpc>
-                <a:spcPct val="90000"/>
-              </a:lnSpc>
-              <a:spcBef>
-                <a:spcPts val="614"/>
+            <a:lvl6pPr marL="1650062" lvl="5" indent="-206258" algn="l">
+              <a:lnSpc>
+                <a:spcPct val="90000"/>
+              </a:lnSpc>
+              <a:spcBef>
+                <a:spcPts val="308"/>
               </a:spcBef>
               <a:spcAft>
                 <a:spcPts val="0"/>
@@ -5998,12 +5998,12 @@
               <a:buChar char="•"/>
               <a:defRPr/>
             </a:lvl6pPr>
-            <a:lvl7pPr marL="3840160" lvl="6" indent="-411446" algn="l">
-              <a:lnSpc>
-                <a:spcPct val="90000"/>
-              </a:lnSpc>
-              <a:spcBef>
-                <a:spcPts val="614"/>
+            <a:lvl7pPr marL="1925072" lvl="6" indent="-206258" algn="l">
+              <a:lnSpc>
+                <a:spcPct val="90000"/>
+              </a:lnSpc>
+              <a:spcBef>
+                <a:spcPts val="308"/>
               </a:spcBef>
               <a:spcAft>
                 <a:spcPts val="0"/>
@@ -6015,12 +6015,12 @@
               <a:buChar char="•"/>
               <a:defRPr/>
             </a:lvl7pPr>
-            <a:lvl8pPr marL="4388754" lvl="7" indent="-411446" algn="l">
-              <a:lnSpc>
-                <a:spcPct val="90000"/>
-              </a:lnSpc>
-              <a:spcBef>
-                <a:spcPts val="614"/>
+            <a:lvl8pPr marL="2200082" lvl="7" indent="-206258" algn="l">
+              <a:lnSpc>
+                <a:spcPct val="90000"/>
+              </a:lnSpc>
+              <a:spcBef>
+                <a:spcPts val="308"/>
               </a:spcBef>
               <a:spcAft>
                 <a:spcPts val="0"/>
@@ -6032,12 +6032,12 @@
               <a:buChar char="•"/>
               <a:defRPr/>
             </a:lvl8pPr>
-            <a:lvl9pPr marL="4937349" lvl="8" indent="-411446" algn="l">
-              <a:lnSpc>
-                <a:spcPct val="90000"/>
-              </a:lnSpc>
-              <a:spcBef>
-                <a:spcPts val="614"/>
+            <a:lvl9pPr marL="2475093" lvl="8" indent="-206258" algn="l">
+              <a:lnSpc>
+                <a:spcPct val="90000"/>
+              </a:lnSpc>
+              <a:spcBef>
+                <a:spcPts val="308"/>
               </a:spcBef>
               <a:spcAft>
                 <a:spcPts val="0"/>
@@ -6067,8 +6067,8 @@
         </p:nvSpPr>
         <p:spPr>
           <a:xfrm>
-            <a:off x="940466" y="6006165"/>
-            <a:ext cx="3077885" cy="345009"/>
+            <a:off x="471488" y="8475138"/>
+            <a:ext cx="1543050" cy="486833"/>
           </a:xfrm>
           <a:prstGeom prst="rect">
             <a:avLst/>
@@ -6200,8 +6200,8 @@
         </p:nvSpPr>
         <p:spPr>
           <a:xfrm>
-            <a:off x="4531331" y="6006165"/>
-            <a:ext cx="4616826" cy="345009"/>
+            <a:off x="2271713" y="8475138"/>
+            <a:ext cx="2314574" cy="486833"/>
           </a:xfrm>
           <a:prstGeom prst="rect">
             <a:avLst/>
@@ -6333,8 +6333,8 @@
         </p:nvSpPr>
         <p:spPr>
           <a:xfrm>
-            <a:off x="9661140" y="6006165"/>
-            <a:ext cx="3077885" cy="345009"/>
+            <a:off x="4843464" y="8475138"/>
+            <a:ext cx="1543050" cy="486833"/>
           </a:xfrm>
           <a:prstGeom prst="rect">
             <a:avLst/>
@@ -6460,8 +6460,8 @@
         </p:nvSpPr>
         <p:spPr>
           <a:xfrm>
-            <a:off x="942249" y="345014"/>
-            <a:ext cx="11798558" cy="1252533"/>
+            <a:off x="472382" y="486840"/>
+            <a:ext cx="5915025" cy="1767416"/>
           </a:xfrm>
           <a:prstGeom prst="rect">
             <a:avLst/>
@@ -6599,8 +6599,8 @@
         </p:nvSpPr>
         <p:spPr>
           <a:xfrm>
-            <a:off x="942248" y="1588546"/>
-            <a:ext cx="5787064" cy="778520"/>
+            <a:off x="472382" y="2241554"/>
+            <a:ext cx="2901255" cy="1098549"/>
           </a:xfrm>
           <a:prstGeom prst="rect">
             <a:avLst/>
@@ -6615,12 +6615,12 @@
             <a:normAutofit/>
           </a:bodyPr>
           <a:lstStyle>
-            <a:lvl1pPr marL="548594" lvl="0" indent="-274297" algn="l">
-              <a:lnSpc>
-                <a:spcPct val="90000"/>
-              </a:lnSpc>
-              <a:spcBef>
-                <a:spcPts val="1229"/>
+            <a:lvl1pPr marL="275010" lvl="0" indent="-137505" algn="l">
+              <a:lnSpc>
+                <a:spcPct val="90000"/>
+              </a:lnSpc>
+              <a:spcBef>
+                <a:spcPts val="616"/>
               </a:spcBef>
               <a:spcAft>
                 <a:spcPts val="0"/>
@@ -6630,14 +6630,14 @@
               </a:buClr>
               <a:buSzPts val="2457"/>
               <a:buNone/>
-              <a:defRPr sz="2948" b="1"/>
+              <a:defRPr sz="1478" b="1"/>
             </a:lvl1pPr>
-            <a:lvl2pPr marL="1097189" lvl="1" indent="-274297" algn="l">
-              <a:lnSpc>
-                <a:spcPct val="90000"/>
-              </a:lnSpc>
-              <a:spcBef>
-                <a:spcPts val="614"/>
+            <a:lvl2pPr marL="550021" lvl="1" indent="-137505" algn="l">
+              <a:lnSpc>
+                <a:spcPct val="90000"/>
+              </a:lnSpc>
+              <a:spcBef>
+                <a:spcPts val="308"/>
               </a:spcBef>
               <a:spcAft>
                 <a:spcPts val="0"/>
@@ -6647,14 +6647,14 @@
               </a:buClr>
               <a:buSzPts val="2047"/>
               <a:buNone/>
-              <a:defRPr sz="2456" b="1"/>
+              <a:defRPr sz="1231" b="1"/>
             </a:lvl2pPr>
-            <a:lvl3pPr marL="1645783" lvl="2" indent="-274297" algn="l">
-              <a:lnSpc>
-                <a:spcPct val="90000"/>
-              </a:lnSpc>
-              <a:spcBef>
-                <a:spcPts val="614"/>
+            <a:lvl3pPr marL="825031" lvl="2" indent="-137505" algn="l">
+              <a:lnSpc>
+                <a:spcPct val="90000"/>
+              </a:lnSpc>
+              <a:spcBef>
+                <a:spcPts val="308"/>
               </a:spcBef>
               <a:spcAft>
                 <a:spcPts val="0"/>
@@ -6664,14 +6664,14 @@
               </a:buClr>
               <a:buSzPts val="1842"/>
               <a:buNone/>
-              <a:defRPr sz="2210" b="1"/>
+              <a:defRPr sz="1108" b="1"/>
             </a:lvl3pPr>
-            <a:lvl4pPr marL="2194377" lvl="3" indent="-274297" algn="l">
-              <a:lnSpc>
-                <a:spcPct val="90000"/>
-              </a:lnSpc>
-              <a:spcBef>
-                <a:spcPts val="614"/>
+            <a:lvl4pPr marL="1100041" lvl="3" indent="-137505" algn="l">
+              <a:lnSpc>
+                <a:spcPct val="90000"/>
+              </a:lnSpc>
+              <a:spcBef>
+                <a:spcPts val="308"/>
               </a:spcBef>
               <a:spcAft>
                 <a:spcPts val="0"/>
@@ -6681,14 +6681,14 @@
               </a:buClr>
               <a:buSzPts val="1638"/>
               <a:buNone/>
-              <a:defRPr sz="1965" b="1"/>
+              <a:defRPr sz="985" b="1"/>
             </a:lvl4pPr>
-            <a:lvl5pPr marL="2742971" lvl="4" indent="-274297" algn="l">
-              <a:lnSpc>
-                <a:spcPct val="90000"/>
-              </a:lnSpc>
-              <a:spcBef>
-                <a:spcPts val="614"/>
+            <a:lvl5pPr marL="1375051" lvl="4" indent="-137505" algn="l">
+              <a:lnSpc>
+                <a:spcPct val="90000"/>
+              </a:lnSpc>
+              <a:spcBef>
+                <a:spcPts val="308"/>
               </a:spcBef>
               <a:spcAft>
                 <a:spcPts val="0"/>
@@ -6698,14 +6698,14 @@
               </a:buClr>
               <a:buSzPts val="1638"/>
               <a:buNone/>
-              <a:defRPr sz="1965" b="1"/>
+              <a:defRPr sz="985" b="1"/>
             </a:lvl5pPr>
-            <a:lvl6pPr marL="3291566" lvl="5" indent="-274297" algn="l">
-              <a:lnSpc>
-                <a:spcPct val="90000"/>
-              </a:lnSpc>
-              <a:spcBef>
-                <a:spcPts val="614"/>
+            <a:lvl6pPr marL="1650062" lvl="5" indent="-137505" algn="l">
+              <a:lnSpc>
+                <a:spcPct val="90000"/>
+              </a:lnSpc>
+              <a:spcBef>
+                <a:spcPts val="308"/>
               </a:spcBef>
               <a:spcAft>
                 <a:spcPts val="0"/>
@@ -6715,14 +6715,14 @@
               </a:buClr>
               <a:buSzPts val="1638"/>
               <a:buNone/>
-              <a:defRPr sz="1965" b="1"/>
+              <a:defRPr sz="985" b="1"/>
             </a:lvl6pPr>
-            <a:lvl7pPr marL="3840160" lvl="6" indent="-274297" algn="l">
-              <a:lnSpc>
-                <a:spcPct val="90000"/>
-              </a:lnSpc>
-              <a:spcBef>
-                <a:spcPts val="614"/>
+            <a:lvl7pPr marL="1925072" lvl="6" indent="-137505" algn="l">
+              <a:lnSpc>
+                <a:spcPct val="90000"/>
+              </a:lnSpc>
+              <a:spcBef>
+                <a:spcPts val="308"/>
               </a:spcBef>
               <a:spcAft>
                 <a:spcPts val="0"/>
@@ -6732,14 +6732,14 @@
               </a:buClr>
               <a:buSzPts val="1638"/>
               <a:buNone/>
-              <a:defRPr sz="1965" b="1"/>
+              <a:defRPr sz="985" b="1"/>
             </a:lvl7pPr>
-            <a:lvl8pPr marL="4388754" lvl="7" indent="-274297" algn="l">
-              <a:lnSpc>
-                <a:spcPct val="90000"/>
-              </a:lnSpc>
-              <a:spcBef>
-                <a:spcPts val="614"/>
+            <a:lvl8pPr marL="2200082" lvl="7" indent="-137505" algn="l">
+              <a:lnSpc>
+                <a:spcPct val="90000"/>
+              </a:lnSpc>
+              <a:spcBef>
+                <a:spcPts val="308"/>
               </a:spcBef>
               <a:spcAft>
                 <a:spcPts val="0"/>
@@ -6749,14 +6749,14 @@
               </a:buClr>
               <a:buSzPts val="1638"/>
               <a:buNone/>
-              <a:defRPr sz="1965" b="1"/>
+              <a:defRPr sz="985" b="1"/>
             </a:lvl8pPr>
-            <a:lvl9pPr marL="4937349" lvl="8" indent="-274297" algn="l">
-              <a:lnSpc>
-                <a:spcPct val="90000"/>
-              </a:lnSpc>
-              <a:spcBef>
-                <a:spcPts val="614"/>
+            <a:lvl9pPr marL="2475093" lvl="8" indent="-137505" algn="l">
+              <a:lnSpc>
+                <a:spcPct val="90000"/>
+              </a:lnSpc>
+              <a:spcBef>
+                <a:spcPts val="308"/>
               </a:spcBef>
               <a:spcAft>
                 <a:spcPts val="0"/>
@@ -6766,7 +6766,7 @@
               </a:buClr>
               <a:buSzPts val="1638"/>
               <a:buNone/>
-              <a:defRPr sz="1965" b="1"/>
+              <a:defRPr sz="985" b="1"/>
             </a:lvl9pPr>
           </a:lstStyle>
           <a:p>
@@ -6786,8 +6786,8 @@
         </p:nvSpPr>
         <p:spPr>
           <a:xfrm>
-            <a:off x="942248" y="2367068"/>
-            <a:ext cx="5787064" cy="3481593"/>
+            <a:off x="472382" y="3340106"/>
+            <a:ext cx="2901255" cy="4912782"/>
           </a:xfrm>
           <a:prstGeom prst="rect">
             <a:avLst/>
@@ -6802,12 +6802,12 @@
             <a:normAutofit/>
           </a:bodyPr>
           <a:lstStyle>
-            <a:lvl1pPr marL="548594" lvl="0" indent="-411446" algn="l">
-              <a:lnSpc>
-                <a:spcPct val="90000"/>
-              </a:lnSpc>
-              <a:spcBef>
-                <a:spcPts val="1229"/>
+            <a:lvl1pPr marL="275010" lvl="0" indent="-206258" algn="l">
+              <a:lnSpc>
+                <a:spcPct val="90000"/>
+              </a:lnSpc>
+              <a:spcBef>
+                <a:spcPts val="616"/>
               </a:spcBef>
               <a:spcAft>
                 <a:spcPts val="0"/>
@@ -6819,12 +6819,12 @@
               <a:buChar char="•"/>
               <a:defRPr/>
             </a:lvl1pPr>
-            <a:lvl2pPr marL="1097189" lvl="1" indent="-411446" algn="l">
-              <a:lnSpc>
-                <a:spcPct val="90000"/>
-              </a:lnSpc>
-              <a:spcBef>
-                <a:spcPts val="614"/>
+            <a:lvl2pPr marL="550021" lvl="1" indent="-206258" algn="l">
+              <a:lnSpc>
+                <a:spcPct val="90000"/>
+              </a:lnSpc>
+              <a:spcBef>
+                <a:spcPts val="308"/>
               </a:spcBef>
               <a:spcAft>
                 <a:spcPts val="0"/>
@@ -6836,12 +6836,12 @@
               <a:buChar char="•"/>
               <a:defRPr/>
             </a:lvl2pPr>
-            <a:lvl3pPr marL="1645783" lvl="2" indent="-411446" algn="l">
-              <a:lnSpc>
-                <a:spcPct val="90000"/>
-              </a:lnSpc>
-              <a:spcBef>
-                <a:spcPts val="614"/>
+            <a:lvl3pPr marL="825031" lvl="2" indent="-206258" algn="l">
+              <a:lnSpc>
+                <a:spcPct val="90000"/>
+              </a:lnSpc>
+              <a:spcBef>
+                <a:spcPts val="308"/>
               </a:spcBef>
               <a:spcAft>
                 <a:spcPts val="0"/>
@@ -6853,12 +6853,12 @@
               <a:buChar char="•"/>
               <a:defRPr/>
             </a:lvl3pPr>
-            <a:lvl4pPr marL="2194377" lvl="3" indent="-411446" algn="l">
-              <a:lnSpc>
-                <a:spcPct val="90000"/>
-              </a:lnSpc>
-              <a:spcBef>
-                <a:spcPts val="614"/>
+            <a:lvl4pPr marL="1100041" lvl="3" indent="-206258" algn="l">
+              <a:lnSpc>
+                <a:spcPct val="90000"/>
+              </a:lnSpc>
+              <a:spcBef>
+                <a:spcPts val="308"/>
               </a:spcBef>
               <a:spcAft>
                 <a:spcPts val="0"/>
@@ -6870,12 +6870,12 @@
               <a:buChar char="•"/>
               <a:defRPr/>
             </a:lvl4pPr>
-            <a:lvl5pPr marL="2742971" lvl="4" indent="-411446" algn="l">
-              <a:lnSpc>
-                <a:spcPct val="90000"/>
-              </a:lnSpc>
-              <a:spcBef>
-                <a:spcPts val="614"/>
+            <a:lvl5pPr marL="1375051" lvl="4" indent="-206258" algn="l">
+              <a:lnSpc>
+                <a:spcPct val="90000"/>
+              </a:lnSpc>
+              <a:spcBef>
+                <a:spcPts val="308"/>
               </a:spcBef>
               <a:spcAft>
                 <a:spcPts val="0"/>
@@ -6887,12 +6887,12 @@
               <a:buChar char="•"/>
               <a:defRPr/>
             </a:lvl5pPr>
-            <a:lvl6pPr marL="3291566" lvl="5" indent="-411446" algn="l">
-              <a:lnSpc>
-                <a:spcPct val="90000"/>
-              </a:lnSpc>
-              <a:spcBef>
-                <a:spcPts val="614"/>
+            <a:lvl6pPr marL="1650062" lvl="5" indent="-206258" algn="l">
+              <a:lnSpc>
+                <a:spcPct val="90000"/>
+              </a:lnSpc>
+              <a:spcBef>
+                <a:spcPts val="308"/>
               </a:spcBef>
               <a:spcAft>
                 <a:spcPts val="0"/>
@@ -6904,12 +6904,12 @@
               <a:buChar char="•"/>
               <a:defRPr/>
             </a:lvl6pPr>
-            <a:lvl7pPr marL="3840160" lvl="6" indent="-411446" algn="l">
-              <a:lnSpc>
-                <a:spcPct val="90000"/>
-              </a:lnSpc>
-              <a:spcBef>
-                <a:spcPts val="614"/>
+            <a:lvl7pPr marL="1925072" lvl="6" indent="-206258" algn="l">
+              <a:lnSpc>
+                <a:spcPct val="90000"/>
+              </a:lnSpc>
+              <a:spcBef>
+                <a:spcPts val="308"/>
               </a:spcBef>
               <a:spcAft>
                 <a:spcPts val="0"/>
@@ -6921,12 +6921,12 @@
               <a:buChar char="•"/>
               <a:defRPr/>
             </a:lvl7pPr>
-            <a:lvl8pPr marL="4388754" lvl="7" indent="-411446" algn="l">
-              <a:lnSpc>
-                <a:spcPct val="90000"/>
-              </a:lnSpc>
-              <a:spcBef>
-                <a:spcPts val="614"/>
+            <a:lvl8pPr marL="2200082" lvl="7" indent="-206258" algn="l">
+              <a:lnSpc>
+                <a:spcPct val="90000"/>
+              </a:lnSpc>
+              <a:spcBef>
+                <a:spcPts val="308"/>
               </a:spcBef>
               <a:spcAft>
                 <a:spcPts val="0"/>
@@ -6938,12 +6938,12 @@
               <a:buChar char="•"/>
               <a:defRPr/>
             </a:lvl8pPr>
-            <a:lvl9pPr marL="4937349" lvl="8" indent="-411446" algn="l">
-              <a:lnSpc>
-                <a:spcPct val="90000"/>
-              </a:lnSpc>
-              <a:spcBef>
-                <a:spcPts val="614"/>
+            <a:lvl9pPr marL="2475093" lvl="8" indent="-206258" algn="l">
+              <a:lnSpc>
+                <a:spcPct val="90000"/>
+              </a:lnSpc>
+              <a:spcBef>
+                <a:spcPts val="308"/>
               </a:spcBef>
               <a:spcAft>
                 <a:spcPts val="0"/>
@@ -6973,8 +6973,8 @@
         </p:nvSpPr>
         <p:spPr>
           <a:xfrm>
-            <a:off x="6925242" y="1588546"/>
-            <a:ext cx="5815564" cy="778520"/>
+            <a:off x="3471863" y="2241554"/>
+            <a:ext cx="2915543" cy="1098549"/>
           </a:xfrm>
           <a:prstGeom prst="rect">
             <a:avLst/>
@@ -6989,12 +6989,12 @@
             <a:normAutofit/>
           </a:bodyPr>
           <a:lstStyle>
-            <a:lvl1pPr marL="548594" lvl="0" indent="-274297" algn="l">
-              <a:lnSpc>
-                <a:spcPct val="90000"/>
-              </a:lnSpc>
-              <a:spcBef>
-                <a:spcPts val="1229"/>
+            <a:lvl1pPr marL="275010" lvl="0" indent="-137505" algn="l">
+              <a:lnSpc>
+                <a:spcPct val="90000"/>
+              </a:lnSpc>
+              <a:spcBef>
+                <a:spcPts val="616"/>
               </a:spcBef>
               <a:spcAft>
                 <a:spcPts val="0"/>
@@ -7004,14 +7004,14 @@
               </a:buClr>
               <a:buSzPts val="2457"/>
               <a:buNone/>
-              <a:defRPr sz="2948" b="1"/>
+              <a:defRPr sz="1478" b="1"/>
             </a:lvl1pPr>
-            <a:lvl2pPr marL="1097189" lvl="1" indent="-274297" algn="l">
-              <a:lnSpc>
-                <a:spcPct val="90000"/>
-              </a:lnSpc>
-              <a:spcBef>
-                <a:spcPts val="614"/>
+            <a:lvl2pPr marL="550021" lvl="1" indent="-137505" algn="l">
+              <a:lnSpc>
+                <a:spcPct val="90000"/>
+              </a:lnSpc>
+              <a:spcBef>
+                <a:spcPts val="308"/>
               </a:spcBef>
               <a:spcAft>
                 <a:spcPts val="0"/>
@@ -7021,14 +7021,14 @@
               </a:buClr>
               <a:buSzPts val="2047"/>
               <a:buNone/>
-              <a:defRPr sz="2456" b="1"/>
+              <a:defRPr sz="1231" b="1"/>
             </a:lvl2pPr>
-            <a:lvl3pPr marL="1645783" lvl="2" indent="-274297" algn="l">
-              <a:lnSpc>
-                <a:spcPct val="90000"/>
-              </a:lnSpc>
-              <a:spcBef>
-                <a:spcPts val="614"/>
+            <a:lvl3pPr marL="825031" lvl="2" indent="-137505" algn="l">
+              <a:lnSpc>
+                <a:spcPct val="90000"/>
+              </a:lnSpc>
+              <a:spcBef>
+                <a:spcPts val="308"/>
               </a:spcBef>
               <a:spcAft>
                 <a:spcPts val="0"/>
@@ -7038,14 +7038,14 @@
               </a:buClr>
               <a:buSzPts val="1842"/>
               <a:buNone/>
-              <a:defRPr sz="2210" b="1"/>
+              <a:defRPr sz="1108" b="1"/>
             </a:lvl3pPr>
-            <a:lvl4pPr marL="2194377" lvl="3" indent="-274297" algn="l">
-              <a:lnSpc>
-                <a:spcPct val="90000"/>
-              </a:lnSpc>
-              <a:spcBef>
-                <a:spcPts val="614"/>
+            <a:lvl4pPr marL="1100041" lvl="3" indent="-137505" algn="l">
+              <a:lnSpc>
+                <a:spcPct val="90000"/>
+              </a:lnSpc>
+              <a:spcBef>
+                <a:spcPts val="308"/>
               </a:spcBef>
               <a:spcAft>
                 <a:spcPts val="0"/>
@@ -7055,14 +7055,14 @@
               </a:buClr>
               <a:buSzPts val="1638"/>
               <a:buNone/>
-              <a:defRPr sz="1965" b="1"/>
+              <a:defRPr sz="985" b="1"/>
             </a:lvl4pPr>
-            <a:lvl5pPr marL="2742971" lvl="4" indent="-274297" algn="l">
-              <a:lnSpc>
-                <a:spcPct val="90000"/>
-              </a:lnSpc>
-              <a:spcBef>
-                <a:spcPts val="614"/>
+            <a:lvl5pPr marL="1375051" lvl="4" indent="-137505" algn="l">
+              <a:lnSpc>
+                <a:spcPct val="90000"/>
+              </a:lnSpc>
+              <a:spcBef>
+                <a:spcPts val="308"/>
               </a:spcBef>
               <a:spcAft>
                 <a:spcPts val="0"/>
@@ -7072,14 +7072,14 @@
               </a:buClr>
               <a:buSzPts val="1638"/>
               <a:buNone/>
-              <a:defRPr sz="1965" b="1"/>
+              <a:defRPr sz="985" b="1"/>
             </a:lvl5pPr>
-            <a:lvl6pPr marL="3291566" lvl="5" indent="-274297" algn="l">
-              <a:lnSpc>
-                <a:spcPct val="90000"/>
-              </a:lnSpc>
-              <a:spcBef>
-                <a:spcPts val="614"/>
+            <a:lvl6pPr marL="1650062" lvl="5" indent="-137505" algn="l">
+              <a:lnSpc>
+                <a:spcPct val="90000"/>
+              </a:lnSpc>
+              <a:spcBef>
+                <a:spcPts val="308"/>
               </a:spcBef>
               <a:spcAft>
                 <a:spcPts val="0"/>
@@ -7089,14 +7089,14 @@
               </a:buClr>
               <a:buSzPts val="1638"/>
               <a:buNone/>
-              <a:defRPr sz="1965" b="1"/>
+              <a:defRPr sz="985" b="1"/>
             </a:lvl6pPr>
-            <a:lvl7pPr marL="3840160" lvl="6" indent="-274297" algn="l">
-              <a:lnSpc>
-                <a:spcPct val="90000"/>
-              </a:lnSpc>
-              <a:spcBef>
-                <a:spcPts val="614"/>
+            <a:lvl7pPr marL="1925072" lvl="6" indent="-137505" algn="l">
+              <a:lnSpc>
+                <a:spcPct val="90000"/>
+              </a:lnSpc>
+              <a:spcBef>
+                <a:spcPts val="308"/>
               </a:spcBef>
               <a:spcAft>
                 <a:spcPts val="0"/>
@@ -7106,14 +7106,14 @@
               </a:buClr>
               <a:buSzPts val="1638"/>
               <a:buNone/>
-              <a:defRPr sz="1965" b="1"/>
+              <a:defRPr sz="985" b="1"/>
             </a:lvl7pPr>
-            <a:lvl8pPr marL="4388754" lvl="7" indent="-274297" algn="l">
-              <a:lnSpc>
-                <a:spcPct val="90000"/>
-              </a:lnSpc>
-              <a:spcBef>
-                <a:spcPts val="614"/>
+            <a:lvl8pPr marL="2200082" lvl="7" indent="-137505" algn="l">
+              <a:lnSpc>
+                <a:spcPct val="90000"/>
+              </a:lnSpc>
+              <a:spcBef>
+                <a:spcPts val="308"/>
               </a:spcBef>
               <a:spcAft>
                 <a:spcPts val="0"/>
@@ -7123,14 +7123,14 @@
               </a:buClr>
               <a:buSzPts val="1638"/>
               <a:buNone/>
-              <a:defRPr sz="1965" b="1"/>
+              <a:defRPr sz="985" b="1"/>
             </a:lvl8pPr>
-            <a:lvl9pPr marL="4937349" lvl="8" indent="-274297" algn="l">
-              <a:lnSpc>
-                <a:spcPct val="90000"/>
-              </a:lnSpc>
-              <a:spcBef>
-                <a:spcPts val="614"/>
+            <a:lvl9pPr marL="2475093" lvl="8" indent="-137505" algn="l">
+              <a:lnSpc>
+                <a:spcPct val="90000"/>
+              </a:lnSpc>
+              <a:spcBef>
+                <a:spcPts val="308"/>
               </a:spcBef>
               <a:spcAft>
                 <a:spcPts val="0"/>
@@ -7140,7 +7140,7 @@
               </a:buClr>
               <a:buSzPts val="1638"/>
               <a:buNone/>
-              <a:defRPr sz="1965" b="1"/>
+              <a:defRPr sz="985" b="1"/>
             </a:lvl9pPr>
           </a:lstStyle>
           <a:p>
@@ -7160,8 +7160,8 @@
         </p:nvSpPr>
         <p:spPr>
           <a:xfrm>
-            <a:off x="6925242" y="2367068"/>
-            <a:ext cx="5815564" cy="3481593"/>
+            <a:off x="3471863" y="3340106"/>
+            <a:ext cx="2915543" cy="4912782"/>
           </a:xfrm>
           <a:prstGeom prst="rect">
             <a:avLst/>
@@ -7176,12 +7176,12 @@
             <a:normAutofit/>
           </a:bodyPr>
           <a:lstStyle>
-            <a:lvl1pPr marL="548594" lvl="0" indent="-411446" algn="l">
-              <a:lnSpc>
-                <a:spcPct val="90000"/>
-              </a:lnSpc>
-              <a:spcBef>
-                <a:spcPts val="1229"/>
+            <a:lvl1pPr marL="275010" lvl="0" indent="-206258" algn="l">
+              <a:lnSpc>
+                <a:spcPct val="90000"/>
+              </a:lnSpc>
+              <a:spcBef>
+                <a:spcPts val="616"/>
               </a:spcBef>
               <a:spcAft>
                 <a:spcPts val="0"/>
@@ -7193,12 +7193,12 @@
               <a:buChar char="•"/>
               <a:defRPr/>
             </a:lvl1pPr>
-            <a:lvl2pPr marL="1097189" lvl="1" indent="-411446" algn="l">
-              <a:lnSpc>
-                <a:spcPct val="90000"/>
-              </a:lnSpc>
-              <a:spcBef>
-                <a:spcPts val="614"/>
+            <a:lvl2pPr marL="550021" lvl="1" indent="-206258" algn="l">
+              <a:lnSpc>
+                <a:spcPct val="90000"/>
+              </a:lnSpc>
+              <a:spcBef>
+                <a:spcPts val="308"/>
               </a:spcBef>
               <a:spcAft>
                 <a:spcPts val="0"/>
@@ -7210,12 +7210,12 @@
               <a:buChar char="•"/>
               <a:defRPr/>
             </a:lvl2pPr>
-            <a:lvl3pPr marL="1645783" lvl="2" indent="-411446" algn="l">
-              <a:lnSpc>
-                <a:spcPct val="90000"/>
-              </a:lnSpc>
-              <a:spcBef>
-                <a:spcPts val="614"/>
+            <a:lvl3pPr marL="825031" lvl="2" indent="-206258" algn="l">
+              <a:lnSpc>
+                <a:spcPct val="90000"/>
+              </a:lnSpc>
+              <a:spcBef>
+                <a:spcPts val="308"/>
               </a:spcBef>
               <a:spcAft>
                 <a:spcPts val="0"/>
@@ -7227,12 +7227,12 @@
               <a:buChar char="•"/>
               <a:defRPr/>
             </a:lvl3pPr>
-            <a:lvl4pPr marL="2194377" lvl="3" indent="-411446" algn="l">
-              <a:lnSpc>
-                <a:spcPct val="90000"/>
-              </a:lnSpc>
-              <a:spcBef>
-                <a:spcPts val="614"/>
+            <a:lvl4pPr marL="1100041" lvl="3" indent="-206258" algn="l">
+              <a:lnSpc>
+                <a:spcPct val="90000"/>
+              </a:lnSpc>
+              <a:spcBef>
+                <a:spcPts val="308"/>
               </a:spcBef>
               <a:spcAft>
                 <a:spcPts val="0"/>
@@ -7244,12 +7244,12 @@
               <a:buChar char="•"/>
               <a:defRPr/>
             </a:lvl4pPr>
-            <a:lvl5pPr marL="2742971" lvl="4" indent="-411446" algn="l">
-              <a:lnSpc>
-                <a:spcPct val="90000"/>
-              </a:lnSpc>
-              <a:spcBef>
-                <a:spcPts val="614"/>
+            <a:lvl5pPr marL="1375051" lvl="4" indent="-206258" algn="l">
+              <a:lnSpc>
+                <a:spcPct val="90000"/>
+              </a:lnSpc>
+              <a:spcBef>
+                <a:spcPts val="308"/>
               </a:spcBef>
               <a:spcAft>
                 <a:spcPts val="0"/>
@@ -7261,12 +7261,12 @@
               <a:buChar char="•"/>
               <a:defRPr/>
             </a:lvl5pPr>
-            <a:lvl6pPr marL="3291566" lvl="5" indent="-411446" algn="l">
-              <a:lnSpc>
-                <a:spcPct val="90000"/>
-              </a:lnSpc>
-              <a:spcBef>
-                <a:spcPts val="614"/>
+            <a:lvl6pPr marL="1650062" lvl="5" indent="-206258" algn="l">
+              <a:lnSpc>
+                <a:spcPct val="90000"/>
+              </a:lnSpc>
+              <a:spcBef>
+                <a:spcPts val="308"/>
               </a:spcBef>
               <a:spcAft>
                 <a:spcPts val="0"/>
@@ -7278,12 +7278,12 @@
               <a:buChar char="•"/>
               <a:defRPr/>
             </a:lvl6pPr>
-            <a:lvl7pPr marL="3840160" lvl="6" indent="-411446" algn="l">
-              <a:lnSpc>
-                <a:spcPct val="90000"/>
-              </a:lnSpc>
-              <a:spcBef>
-                <a:spcPts val="614"/>
+            <a:lvl7pPr marL="1925072" lvl="6" indent="-206258" algn="l">
+              <a:lnSpc>
+                <a:spcPct val="90000"/>
+              </a:lnSpc>
+              <a:spcBef>
+                <a:spcPts val="308"/>
               </a:spcBef>
               <a:spcAft>
                 <a:spcPts val="0"/>
@@ -7295,12 +7295,12 @@
               <a:buChar char="•"/>
               <a:defRPr/>
             </a:lvl7pPr>
-            <a:lvl8pPr marL="4388754" lvl="7" indent="-411446" algn="l">
-              <a:lnSpc>
-                <a:spcPct val="90000"/>
-              </a:lnSpc>
-              <a:spcBef>
-                <a:spcPts val="614"/>
+            <a:lvl8pPr marL="2200082" lvl="7" indent="-206258" algn="l">
+              <a:lnSpc>
+                <a:spcPct val="90000"/>
+              </a:lnSpc>
+              <a:spcBef>
+                <a:spcPts val="308"/>
               </a:spcBef>
               <a:spcAft>
                 <a:spcPts val="0"/>
@@ -7312,12 +7312,12 @@
               <a:buChar char="•"/>
               <a:defRPr/>
             </a:lvl8pPr>
-            <a:lvl9pPr marL="4937349" lvl="8" indent="-411446" algn="l">
-              <a:lnSpc>
-                <a:spcPct val="90000"/>
-              </a:lnSpc>
-              <a:spcBef>
-                <a:spcPts val="614"/>
+            <a:lvl9pPr marL="2475093" lvl="8" indent="-206258" algn="l">
+              <a:lnSpc>
+                <a:spcPct val="90000"/>
+              </a:lnSpc>
+              <a:spcBef>
+                <a:spcPts val="308"/>
               </a:spcBef>
               <a:spcAft>
                 <a:spcPts val="0"/>
@@ -7347,8 +7347,8 @@
         </p:nvSpPr>
         <p:spPr>
           <a:xfrm>
-            <a:off x="940466" y="6006165"/>
-            <a:ext cx="3077885" cy="345009"/>
+            <a:off x="471488" y="8475138"/>
+            <a:ext cx="1543050" cy="486833"/>
           </a:xfrm>
           <a:prstGeom prst="rect">
             <a:avLst/>
@@ -7480,8 +7480,8 @@
         </p:nvSpPr>
         <p:spPr>
           <a:xfrm>
-            <a:off x="4531331" y="6006165"/>
-            <a:ext cx="4616826" cy="345009"/>
+            <a:off x="2271713" y="8475138"/>
+            <a:ext cx="2314574" cy="486833"/>
           </a:xfrm>
           <a:prstGeom prst="rect">
             <a:avLst/>
@@ -7613,8 +7613,8 @@
         </p:nvSpPr>
         <p:spPr>
           <a:xfrm>
-            <a:off x="9661140" y="6006165"/>
-            <a:ext cx="3077885" cy="345009"/>
+            <a:off x="4843464" y="8475138"/>
+            <a:ext cx="1543050" cy="486833"/>
           </a:xfrm>
           <a:prstGeom prst="rect">
             <a:avLst/>
@@ -7740,8 +7740,8 @@
         </p:nvSpPr>
         <p:spPr>
           <a:xfrm>
-            <a:off x="940467" y="345014"/>
-            <a:ext cx="11798558" cy="1252533"/>
+            <a:off x="471489" y="486840"/>
+            <a:ext cx="5915025" cy="1767416"/>
           </a:xfrm>
           <a:prstGeom prst="rect">
             <a:avLst/>
@@ -7879,8 +7879,8 @@
         </p:nvSpPr>
         <p:spPr>
           <a:xfrm>
-            <a:off x="940466" y="6006165"/>
-            <a:ext cx="3077885" cy="345009"/>
+            <a:off x="471488" y="8475138"/>
+            <a:ext cx="1543050" cy="486833"/>
           </a:xfrm>
           <a:prstGeom prst="rect">
             <a:avLst/>
@@ -8012,8 +8012,8 @@
         </p:nvSpPr>
         <p:spPr>
           <a:xfrm>
-            <a:off x="4531331" y="6006165"/>
-            <a:ext cx="4616826" cy="345009"/>
+            <a:off x="2271713" y="8475138"/>
+            <a:ext cx="2314574" cy="486833"/>
           </a:xfrm>
           <a:prstGeom prst="rect">
             <a:avLst/>
@@ -8145,8 +8145,8 @@
         </p:nvSpPr>
         <p:spPr>
           <a:xfrm>
-            <a:off x="9661140" y="6006165"/>
-            <a:ext cx="3077885" cy="345009"/>
+            <a:off x="4843464" y="8475138"/>
+            <a:ext cx="1543050" cy="486833"/>
           </a:xfrm>
           <a:prstGeom prst="rect">
             <a:avLst/>
@@ -8272,8 +8272,8 @@
         </p:nvSpPr>
         <p:spPr>
           <a:xfrm>
-            <a:off x="940466" y="6006165"/>
-            <a:ext cx="3077885" cy="345009"/>
+            <a:off x="471488" y="8475138"/>
+            <a:ext cx="1543050" cy="486833"/>
           </a:xfrm>
           <a:prstGeom prst="rect">
             <a:avLst/>
@@ -8405,8 +8405,8 @@
         </p:nvSpPr>
         <p:spPr>
           <a:xfrm>
-            <a:off x="4531331" y="6006165"/>
-            <a:ext cx="4616826" cy="345009"/>
+            <a:off x="2271713" y="8475138"/>
+            <a:ext cx="2314574" cy="486833"/>
           </a:xfrm>
           <a:prstGeom prst="rect">
             <a:avLst/>
@@ -8538,8 +8538,8 @@
         </p:nvSpPr>
         <p:spPr>
           <a:xfrm>
-            <a:off x="9661140" y="6006165"/>
-            <a:ext cx="3077885" cy="345009"/>
+            <a:off x="4843464" y="8475138"/>
+            <a:ext cx="1543050" cy="486833"/>
           </a:xfrm>
           <a:prstGeom prst="rect">
             <a:avLst/>
@@ -8665,8 +8665,8 @@
         </p:nvSpPr>
         <p:spPr>
           <a:xfrm>
-            <a:off x="942247" y="432013"/>
-            <a:ext cx="4411991" cy="1512041"/>
+            <a:off x="472381" y="609603"/>
+            <a:ext cx="2211884" cy="2133600"/>
           </a:xfrm>
           <a:prstGeom prst="rect">
             <a:avLst/>
@@ -8697,7 +8697,7 @@
               <a:buSzPts val="3276"/>
               <a:buFont typeface="Play"/>
               <a:buNone/>
-              <a:defRPr sz="3931"/>
+              <a:defRPr sz="1971"/>
             </a:lvl1pPr>
             <a:lvl2pPr lvl="1">
               <a:spcBef>
@@ -8805,8 +8805,8 @@
         </p:nvSpPr>
         <p:spPr>
           <a:xfrm>
-            <a:off x="5815565" y="933028"/>
-            <a:ext cx="6925241" cy="4605125"/>
+            <a:off x="2915544" y="1316571"/>
+            <a:ext cx="3471863" cy="6498168"/>
           </a:xfrm>
           <a:prstGeom prst="rect">
             <a:avLst/>
@@ -8821,12 +8821,12 @@
             <a:normAutofit/>
           </a:bodyPr>
           <a:lstStyle>
-            <a:lvl1pPr marL="548594" lvl="0" indent="-523908" algn="l">
-              <a:lnSpc>
-                <a:spcPct val="90000"/>
-              </a:lnSpc>
-              <a:spcBef>
-                <a:spcPts val="1229"/>
+            <a:lvl1pPr marL="275010" lvl="0" indent="-262635" algn="l">
+              <a:lnSpc>
+                <a:spcPct val="90000"/>
+              </a:lnSpc>
+              <a:spcBef>
+                <a:spcPts val="616"/>
               </a:spcBef>
               <a:spcAft>
                 <a:spcPts val="0"/>
@@ -8836,14 +8836,14 @@
               </a:buClr>
               <a:buSzPts val="3276"/>
               <a:buChar char="•"/>
-              <a:defRPr sz="3931"/>
+              <a:defRPr sz="1971"/>
             </a:lvl1pPr>
-            <a:lvl2pPr marL="1097189" lvl="1" indent="-492668" algn="l">
-              <a:lnSpc>
-                <a:spcPct val="90000"/>
-              </a:lnSpc>
-              <a:spcBef>
-                <a:spcPts val="614"/>
+            <a:lvl2pPr marL="550021" lvl="1" indent="-246974" algn="l">
+              <a:lnSpc>
+                <a:spcPct val="90000"/>
+              </a:lnSpc>
+              <a:spcBef>
+                <a:spcPts val="308"/>
               </a:spcBef>
               <a:spcAft>
                 <a:spcPts val="0"/>
@@ -8853,14 +8853,14 @@
               </a:buClr>
               <a:buSzPts val="2866"/>
               <a:buChar char="•"/>
-              <a:defRPr sz="3439"/>
+              <a:defRPr sz="1724"/>
             </a:lvl2pPr>
-            <a:lvl3pPr marL="1645783" lvl="2" indent="-461506" algn="l">
-              <a:lnSpc>
-                <a:spcPct val="90000"/>
-              </a:lnSpc>
-              <a:spcBef>
-                <a:spcPts val="614"/>
+            <a:lvl3pPr marL="825031" lvl="2" indent="-231353" algn="l">
+              <a:lnSpc>
+                <a:spcPct val="90000"/>
+              </a:lnSpc>
+              <a:spcBef>
+                <a:spcPts val="308"/>
               </a:spcBef>
               <a:spcAft>
                 <a:spcPts val="0"/>
@@ -8870,14 +8870,14 @@
               </a:buClr>
               <a:buSzPts val="2457"/>
               <a:buChar char="•"/>
-              <a:defRPr sz="2948"/>
+              <a:defRPr sz="1478"/>
             </a:lvl3pPr>
-            <a:lvl4pPr marL="2194377" lvl="3" indent="-430266" algn="l">
-              <a:lnSpc>
-                <a:spcPct val="90000"/>
-              </a:lnSpc>
-              <a:spcBef>
-                <a:spcPts val="614"/>
+            <a:lvl4pPr marL="1100041" lvl="3" indent="-215692" algn="l">
+              <a:lnSpc>
+                <a:spcPct val="90000"/>
+              </a:lnSpc>
+              <a:spcBef>
+                <a:spcPts val="308"/>
               </a:spcBef>
               <a:spcAft>
                 <a:spcPts val="0"/>
@@ -8887,14 +8887,14 @@
               </a:buClr>
               <a:buSzPts val="2047"/>
               <a:buChar char="•"/>
-              <a:defRPr sz="2456"/>
+              <a:defRPr sz="1231"/>
             </a:lvl4pPr>
-            <a:lvl5pPr marL="2742971" lvl="4" indent="-430266" algn="l">
-              <a:lnSpc>
-                <a:spcPct val="90000"/>
-              </a:lnSpc>
-              <a:spcBef>
-                <a:spcPts val="614"/>
+            <a:lvl5pPr marL="1375051" lvl="4" indent="-215692" algn="l">
+              <a:lnSpc>
+                <a:spcPct val="90000"/>
+              </a:lnSpc>
+              <a:spcBef>
+                <a:spcPts val="308"/>
               </a:spcBef>
               <a:spcAft>
                 <a:spcPts val="0"/>
@@ -8904,14 +8904,14 @@
               </a:buClr>
               <a:buSzPts val="2047"/>
               <a:buChar char="•"/>
-              <a:defRPr sz="2456"/>
+              <a:defRPr sz="1231"/>
             </a:lvl5pPr>
-            <a:lvl6pPr marL="3291566" lvl="5" indent="-430266" algn="l">
-              <a:lnSpc>
-                <a:spcPct val="90000"/>
-              </a:lnSpc>
-              <a:spcBef>
-                <a:spcPts val="614"/>
+            <a:lvl6pPr marL="1650062" lvl="5" indent="-215692" algn="l">
+              <a:lnSpc>
+                <a:spcPct val="90000"/>
+              </a:lnSpc>
+              <a:spcBef>
+                <a:spcPts val="308"/>
               </a:spcBef>
               <a:spcAft>
                 <a:spcPts val="0"/>
@@ -8921,14 +8921,14 @@
               </a:buClr>
               <a:buSzPts val="2047"/>
               <a:buChar char="•"/>
-              <a:defRPr sz="2456"/>
+              <a:defRPr sz="1231"/>
             </a:lvl6pPr>
-            <a:lvl7pPr marL="3840160" lvl="6" indent="-430266" algn="l">
-              <a:lnSpc>
-                <a:spcPct val="90000"/>
-              </a:lnSpc>
-              <a:spcBef>
-                <a:spcPts val="614"/>
+            <a:lvl7pPr marL="1925072" lvl="6" indent="-215692" algn="l">
+              <a:lnSpc>
+                <a:spcPct val="90000"/>
+              </a:lnSpc>
+              <a:spcBef>
+                <a:spcPts val="308"/>
               </a:spcBef>
               <a:spcAft>
                 <a:spcPts val="0"/>
@@ -8938,14 +8938,14 @@
               </a:buClr>
               <a:buSzPts val="2047"/>
               <a:buChar char="•"/>
-              <a:defRPr sz="2456"/>
+              <a:defRPr sz="1231"/>
             </a:lvl7pPr>
-            <a:lvl8pPr marL="4388754" lvl="7" indent="-430265" algn="l">
-              <a:lnSpc>
-                <a:spcPct val="90000"/>
-              </a:lnSpc>
-              <a:spcBef>
-                <a:spcPts val="614"/>
+            <a:lvl8pPr marL="2200082" lvl="7" indent="-215692" algn="l">
+              <a:lnSpc>
+                <a:spcPct val="90000"/>
+              </a:lnSpc>
+              <a:spcBef>
+                <a:spcPts val="308"/>
               </a:spcBef>
               <a:spcAft>
                 <a:spcPts val="0"/>
@@ -8955,14 +8955,14 @@
               </a:buClr>
               <a:buSzPts val="2047"/>
               <a:buChar char="•"/>
-              <a:defRPr sz="2456"/>
+              <a:defRPr sz="1231"/>
             </a:lvl8pPr>
-            <a:lvl9pPr marL="4937349" lvl="8" indent="-430265" algn="l">
-              <a:lnSpc>
-                <a:spcPct val="90000"/>
-              </a:lnSpc>
-              <a:spcBef>
-                <a:spcPts val="614"/>
+            <a:lvl9pPr marL="2475093" lvl="8" indent="-215692" algn="l">
+              <a:lnSpc>
+                <a:spcPct val="90000"/>
+              </a:lnSpc>
+              <a:spcBef>
+                <a:spcPts val="308"/>
               </a:spcBef>
               <a:spcAft>
                 <a:spcPts val="0"/>
@@ -8972,7 +8972,7 @@
               </a:buClr>
               <a:buSzPts val="2047"/>
               <a:buChar char="•"/>
-              <a:defRPr sz="2456"/>
+              <a:defRPr sz="1231"/>
             </a:lvl9pPr>
           </a:lstStyle>
           <a:p>
@@ -8992,8 +8992,8 @@
         </p:nvSpPr>
         <p:spPr>
           <a:xfrm>
-            <a:off x="942247" y="1944056"/>
-            <a:ext cx="4411991" cy="3601597"/>
+            <a:off x="472381" y="2743206"/>
+            <a:ext cx="2211884" cy="5082116"/>
           </a:xfrm>
           <a:prstGeom prst="rect">
             <a:avLst/>
@@ -9008,12 +9008,12 @@
             <a:normAutofit/>
           </a:bodyPr>
           <a:lstStyle>
-            <a:lvl1pPr marL="548594" lvl="0" indent="-274297" algn="l">
-              <a:lnSpc>
-                <a:spcPct val="90000"/>
-              </a:lnSpc>
-              <a:spcBef>
-                <a:spcPts val="1229"/>
+            <a:lvl1pPr marL="275010" lvl="0" indent="-137505" algn="l">
+              <a:lnSpc>
+                <a:spcPct val="90000"/>
+              </a:lnSpc>
+              <a:spcBef>
+                <a:spcPts val="616"/>
               </a:spcBef>
               <a:spcAft>
                 <a:spcPts val="0"/>
@@ -9023,14 +9023,14 @@
               </a:buClr>
               <a:buSzPts val="1638"/>
               <a:buNone/>
-              <a:defRPr sz="1965"/>
+              <a:defRPr sz="985"/>
             </a:lvl1pPr>
-            <a:lvl2pPr marL="1097189" lvl="1" indent="-274297" algn="l">
-              <a:lnSpc>
-                <a:spcPct val="90000"/>
-              </a:lnSpc>
-              <a:spcBef>
-                <a:spcPts val="614"/>
+            <a:lvl2pPr marL="550021" lvl="1" indent="-137505" algn="l">
+              <a:lnSpc>
+                <a:spcPct val="90000"/>
+              </a:lnSpc>
+              <a:spcBef>
+                <a:spcPts val="308"/>
               </a:spcBef>
               <a:spcAft>
                 <a:spcPts val="0"/>
@@ -9040,14 +9040,14 @@
               </a:buClr>
               <a:buSzPts val="1433"/>
               <a:buNone/>
-              <a:defRPr sz="1719"/>
+              <a:defRPr sz="862"/>
             </a:lvl2pPr>
-            <a:lvl3pPr marL="1645783" lvl="2" indent="-274297" algn="l">
-              <a:lnSpc>
-                <a:spcPct val="90000"/>
-              </a:lnSpc>
-              <a:spcBef>
-                <a:spcPts val="614"/>
+            <a:lvl3pPr marL="825031" lvl="2" indent="-137505" algn="l">
+              <a:lnSpc>
+                <a:spcPct val="90000"/>
+              </a:lnSpc>
+              <a:spcBef>
+                <a:spcPts val="308"/>
               </a:spcBef>
               <a:spcAft>
                 <a:spcPts val="0"/>
@@ -9057,14 +9057,14 @@
               </a:buClr>
               <a:buSzPts val="1228"/>
               <a:buNone/>
-              <a:defRPr sz="1473"/>
+              <a:defRPr sz="738"/>
             </a:lvl3pPr>
-            <a:lvl4pPr marL="2194377" lvl="3" indent="-274297" algn="l">
-              <a:lnSpc>
-                <a:spcPct val="90000"/>
-              </a:lnSpc>
-              <a:spcBef>
-                <a:spcPts val="614"/>
+            <a:lvl4pPr marL="1100041" lvl="3" indent="-137505" algn="l">
+              <a:lnSpc>
+                <a:spcPct val="90000"/>
+              </a:lnSpc>
+              <a:spcBef>
+                <a:spcPts val="308"/>
               </a:spcBef>
               <a:spcAft>
                 <a:spcPts val="0"/>
@@ -9074,14 +9074,14 @@
               </a:buClr>
               <a:buSzPts val="1024"/>
               <a:buNone/>
-              <a:defRPr sz="1229"/>
+              <a:defRPr sz="616"/>
             </a:lvl4pPr>
-            <a:lvl5pPr marL="2742971" lvl="4" indent="-274297" algn="l">
-              <a:lnSpc>
-                <a:spcPct val="90000"/>
-              </a:lnSpc>
-              <a:spcBef>
-                <a:spcPts val="614"/>
+            <a:lvl5pPr marL="1375051" lvl="4" indent="-137505" algn="l">
+              <a:lnSpc>
+                <a:spcPct val="90000"/>
+              </a:lnSpc>
+              <a:spcBef>
+                <a:spcPts val="308"/>
               </a:spcBef>
               <a:spcAft>
                 <a:spcPts val="0"/>
@@ -9091,14 +9091,14 @@
               </a:buClr>
               <a:buSzPts val="1024"/>
               <a:buNone/>
-              <a:defRPr sz="1229"/>
+              <a:defRPr sz="616"/>
             </a:lvl5pPr>
-            <a:lvl6pPr marL="3291566" lvl="5" indent="-274297" algn="l">
-              <a:lnSpc>
-                <a:spcPct val="90000"/>
-              </a:lnSpc>
-              <a:spcBef>
-                <a:spcPts val="614"/>
+            <a:lvl6pPr marL="1650062" lvl="5" indent="-137505" algn="l">
+              <a:lnSpc>
+                <a:spcPct val="90000"/>
+              </a:lnSpc>
+              <a:spcBef>
+                <a:spcPts val="308"/>
               </a:spcBef>
               <a:spcAft>
                 <a:spcPts val="0"/>
@@ -9108,14 +9108,14 @@
               </a:buClr>
               <a:buSzPts val="1024"/>
               <a:buNone/>
-              <a:defRPr sz="1229"/>
+              <a:defRPr sz="616"/>
             </a:lvl6pPr>
-            <a:lvl7pPr marL="3840160" lvl="6" indent="-274297" algn="l">
-              <a:lnSpc>
-                <a:spcPct val="90000"/>
-              </a:lnSpc>
-              <a:spcBef>
-                <a:spcPts val="614"/>
+            <a:lvl7pPr marL="1925072" lvl="6" indent="-137505" algn="l">
+              <a:lnSpc>
+                <a:spcPct val="90000"/>
+              </a:lnSpc>
+              <a:spcBef>
+                <a:spcPts val="308"/>
               </a:spcBef>
               <a:spcAft>
                 <a:spcPts val="0"/>
@@ -9125,14 +9125,14 @@
               </a:buClr>
               <a:buSzPts val="1024"/>
               <a:buNone/>
-              <a:defRPr sz="1229"/>
+              <a:defRPr sz="616"/>
             </a:lvl7pPr>
-            <a:lvl8pPr marL="4388754" lvl="7" indent="-274297" algn="l">
-              <a:lnSpc>
-                <a:spcPct val="90000"/>
-              </a:lnSpc>
-              <a:spcBef>
-                <a:spcPts val="614"/>
+            <a:lvl8pPr marL="2200082" lvl="7" indent="-137505" algn="l">
+              <a:lnSpc>
+                <a:spcPct val="90000"/>
+              </a:lnSpc>
+              <a:spcBef>
+                <a:spcPts val="308"/>
               </a:spcBef>
               <a:spcAft>
                 <a:spcPts val="0"/>
@@ -9142,14 +9142,14 @@
               </a:buClr>
               <a:buSzPts val="1024"/>
               <a:buNone/>
-              <a:defRPr sz="1229"/>
+              <a:defRPr sz="616"/>
             </a:lvl8pPr>
-            <a:lvl9pPr marL="4937349" lvl="8" indent="-274297" algn="l">
-              <a:lnSpc>
-                <a:spcPct val="90000"/>
-              </a:lnSpc>
-              <a:spcBef>
-                <a:spcPts val="614"/>
+            <a:lvl9pPr marL="2475093" lvl="8" indent="-137505" algn="l">
+              <a:lnSpc>
+                <a:spcPct val="90000"/>
+              </a:lnSpc>
+              <a:spcBef>
+                <a:spcPts val="308"/>
               </a:spcBef>
               <a:spcAft>
                 <a:spcPts val="0"/>
@@ -9159,7 +9159,7 @@
               </a:buClr>
               <a:buSzPts val="1024"/>
               <a:buNone/>
-              <a:defRPr sz="1229"/>
+              <a:defRPr sz="616"/>
             </a:lvl9pPr>
           </a:lstStyle>
           <a:p>
@@ -9179,8 +9179,8 @@
         </p:nvSpPr>
         <p:spPr>
           <a:xfrm>
-            <a:off x="940466" y="6006165"/>
-            <a:ext cx="3077885" cy="345009"/>
+            <a:off x="471488" y="8475138"/>
+            <a:ext cx="1543050" cy="486833"/>
           </a:xfrm>
           <a:prstGeom prst="rect">
             <a:avLst/>
@@ -9312,8 +9312,8 @@
         </p:nvSpPr>
         <p:spPr>
           <a:xfrm>
-            <a:off x="4531331" y="6006165"/>
-            <a:ext cx="4616826" cy="345009"/>
+            <a:off x="2271713" y="8475138"/>
+            <a:ext cx="2314574" cy="486833"/>
           </a:xfrm>
           <a:prstGeom prst="rect">
             <a:avLst/>
@@ -9445,8 +9445,8 @@
         </p:nvSpPr>
         <p:spPr>
           <a:xfrm>
-            <a:off x="9661140" y="6006165"/>
-            <a:ext cx="3077885" cy="345009"/>
+            <a:off x="4843464" y="8475138"/>
+            <a:ext cx="1543050" cy="486833"/>
           </a:xfrm>
           <a:prstGeom prst="rect">
             <a:avLst/>
@@ -9572,8 +9572,8 @@
         </p:nvSpPr>
         <p:spPr>
           <a:xfrm>
-            <a:off x="942247" y="432013"/>
-            <a:ext cx="4411991" cy="1512041"/>
+            <a:off x="472381" y="609603"/>
+            <a:ext cx="2211884" cy="2133600"/>
           </a:xfrm>
           <a:prstGeom prst="rect">
             <a:avLst/>
@@ -9604,7 +9604,7 @@
               <a:buSzPts val="3276"/>
               <a:buFont typeface="Play"/>
               <a:buNone/>
-              <a:defRPr sz="3931"/>
+              <a:defRPr sz="1971"/>
             </a:lvl1pPr>
             <a:lvl2pPr lvl="1">
               <a:spcBef>
@@ -9712,8 +9712,8 @@
         </p:nvSpPr>
         <p:spPr>
           <a:xfrm>
-            <a:off x="5815565" y="933028"/>
-            <a:ext cx="6925241" cy="4605125"/>
+            <a:off x="2915544" y="1316571"/>
+            <a:ext cx="3471863" cy="6498168"/>
           </a:xfrm>
           <a:prstGeom prst="rect">
             <a:avLst/>
@@ -9736,8 +9736,8 @@
         </p:nvSpPr>
         <p:spPr>
           <a:xfrm>
-            <a:off x="942247" y="1944056"/>
-            <a:ext cx="4411991" cy="3601597"/>
+            <a:off x="472381" y="2743206"/>
+            <a:ext cx="2211884" cy="5082116"/>
           </a:xfrm>
           <a:prstGeom prst="rect">
             <a:avLst/>
@@ -9752,12 +9752,12 @@
             <a:normAutofit/>
           </a:bodyPr>
           <a:lstStyle>
-            <a:lvl1pPr marL="548594" lvl="0" indent="-274297" algn="l">
-              <a:lnSpc>
-                <a:spcPct val="90000"/>
-              </a:lnSpc>
-              <a:spcBef>
-                <a:spcPts val="1229"/>
+            <a:lvl1pPr marL="275010" lvl="0" indent="-137505" algn="l">
+              <a:lnSpc>
+                <a:spcPct val="90000"/>
+              </a:lnSpc>
+              <a:spcBef>
+                <a:spcPts val="616"/>
               </a:spcBef>
               <a:spcAft>
                 <a:spcPts val="0"/>
@@ -9767,14 +9767,14 @@
               </a:buClr>
               <a:buSzPts val="1638"/>
               <a:buNone/>
-              <a:defRPr sz="1965"/>
+              <a:defRPr sz="985"/>
             </a:lvl1pPr>
-            <a:lvl2pPr marL="1097189" lvl="1" indent="-274297" algn="l">
-              <a:lnSpc>
-                <a:spcPct val="90000"/>
-              </a:lnSpc>
-              <a:spcBef>
-                <a:spcPts val="614"/>
+            <a:lvl2pPr marL="550021" lvl="1" indent="-137505" algn="l">
+              <a:lnSpc>
+                <a:spcPct val="90000"/>
+              </a:lnSpc>
+              <a:spcBef>
+                <a:spcPts val="308"/>
               </a:spcBef>
               <a:spcAft>
                 <a:spcPts val="0"/>
@@ -9784,14 +9784,14 @@
               </a:buClr>
               <a:buSzPts val="1433"/>
               <a:buNone/>
-              <a:defRPr sz="1719"/>
+              <a:defRPr sz="862"/>
             </a:lvl2pPr>
-            <a:lvl3pPr marL="1645783" lvl="2" indent="-274297" algn="l">
-              <a:lnSpc>
-                <a:spcPct val="90000"/>
-              </a:lnSpc>
-              <a:spcBef>
-                <a:spcPts val="614"/>
+            <a:lvl3pPr marL="825031" lvl="2" indent="-137505" algn="l">
+              <a:lnSpc>
+                <a:spcPct val="90000"/>
+              </a:lnSpc>
+              <a:spcBef>
+                <a:spcPts val="308"/>
               </a:spcBef>
               <a:spcAft>
                 <a:spcPts val="0"/>
@@ -9801,14 +9801,14 @@
               </a:buClr>
               <a:buSzPts val="1228"/>
               <a:buNone/>
-              <a:defRPr sz="1473"/>
+              <a:defRPr sz="738"/>
             </a:lvl3pPr>
-            <a:lvl4pPr marL="2194377" lvl="3" indent="-274297" algn="l">
-              <a:lnSpc>
-                <a:spcPct val="90000"/>
-              </a:lnSpc>
-              <a:spcBef>
-                <a:spcPts val="614"/>
+            <a:lvl4pPr marL="1100041" lvl="3" indent="-137505" algn="l">
+              <a:lnSpc>
+                <a:spcPct val="90000"/>
+              </a:lnSpc>
+              <a:spcBef>
+                <a:spcPts val="308"/>
               </a:spcBef>
               <a:spcAft>
                 <a:spcPts val="0"/>
@@ -9818,14 +9818,14 @@
               </a:buClr>
               <a:buSzPts val="1024"/>
               <a:buNone/>
-              <a:defRPr sz="1229"/>
+              <a:defRPr sz="616"/>
             </a:lvl4pPr>
-            <a:lvl5pPr marL="2742971" lvl="4" indent="-274297" algn="l">
-              <a:lnSpc>
-                <a:spcPct val="90000"/>
-              </a:lnSpc>
-              <a:spcBef>
-                <a:spcPts val="614"/>
+            <a:lvl5pPr marL="1375051" lvl="4" indent="-137505" algn="l">
+              <a:lnSpc>
+                <a:spcPct val="90000"/>
+              </a:lnSpc>
+              <a:spcBef>
+                <a:spcPts val="308"/>
               </a:spcBef>
               <a:spcAft>
                 <a:spcPts val="0"/>
@@ -9835,14 +9835,14 @@
               </a:buClr>
               <a:buSzPts val="1024"/>
               <a:buNone/>
-              <a:defRPr sz="1229"/>
+              <a:defRPr sz="616"/>
             </a:lvl5pPr>
-            <a:lvl6pPr marL="3291566" lvl="5" indent="-274297" algn="l">
-              <a:lnSpc>
-                <a:spcPct val="90000"/>
-              </a:lnSpc>
-              <a:spcBef>
-                <a:spcPts val="614"/>
+            <a:lvl6pPr marL="1650062" lvl="5" indent="-137505" algn="l">
+              <a:lnSpc>
+                <a:spcPct val="90000"/>
+              </a:lnSpc>
+              <a:spcBef>
+                <a:spcPts val="308"/>
               </a:spcBef>
               <a:spcAft>
                 <a:spcPts val="0"/>
@@ -9852,14 +9852,14 @@
               </a:buClr>
               <a:buSzPts val="1024"/>
               <a:buNone/>
-              <a:defRPr sz="1229"/>
+              <a:defRPr sz="616"/>
             </a:lvl6pPr>
-            <a:lvl7pPr marL="3840160" lvl="6" indent="-274297" algn="l">
-              <a:lnSpc>
-                <a:spcPct val="90000"/>
-              </a:lnSpc>
-              <a:spcBef>
-                <a:spcPts val="614"/>
+            <a:lvl7pPr marL="1925072" lvl="6" indent="-137505" algn="l">
+              <a:lnSpc>
+                <a:spcPct val="90000"/>
+              </a:lnSpc>
+              <a:spcBef>
+                <a:spcPts val="308"/>
               </a:spcBef>
               <a:spcAft>
                 <a:spcPts val="0"/>
@@ -9869,14 +9869,14 @@
               </a:buClr>
               <a:buSzPts val="1024"/>
               <a:buNone/>
-              <a:defRPr sz="1229"/>
+              <a:defRPr sz="616"/>
             </a:lvl7pPr>
-            <a:lvl8pPr marL="4388754" lvl="7" indent="-274297" algn="l">
-              <a:lnSpc>
-                <a:spcPct val="90000"/>
-              </a:lnSpc>
-              <a:spcBef>
-                <a:spcPts val="614"/>
+            <a:lvl8pPr marL="2200082" lvl="7" indent="-137505" algn="l">
+              <a:lnSpc>
+                <a:spcPct val="90000"/>
+              </a:lnSpc>
+              <a:spcBef>
+                <a:spcPts val="308"/>
               </a:spcBef>
               <a:spcAft>
                 <a:spcPts val="0"/>
@@ -9886,14 +9886,14 @@
               </a:buClr>
               <a:buSzPts val="1024"/>
               <a:buNone/>
-              <a:defRPr sz="1229"/>
+              <a:defRPr sz="616"/>
             </a:lvl8pPr>
-            <a:lvl9pPr marL="4937349" lvl="8" indent="-274297" algn="l">
-              <a:lnSpc>
-                <a:spcPct val="90000"/>
-              </a:lnSpc>
-              <a:spcBef>
-                <a:spcPts val="614"/>
+            <a:lvl9pPr marL="2475093" lvl="8" indent="-137505" algn="l">
+              <a:lnSpc>
+                <a:spcPct val="90000"/>
+              </a:lnSpc>
+              <a:spcBef>
+                <a:spcPts val="308"/>
               </a:spcBef>
               <a:spcAft>
                 <a:spcPts val="0"/>
@@ -9903,7 +9903,7 @@
               </a:buClr>
               <a:buSzPts val="1024"/>
               <a:buNone/>
-              <a:defRPr sz="1229"/>
+              <a:defRPr sz="616"/>
             </a:lvl9pPr>
           </a:lstStyle>
           <a:p>
@@ -9923,8 +9923,8 @@
         </p:nvSpPr>
         <p:spPr>
           <a:xfrm>
-            <a:off x="940466" y="6006165"/>
-            <a:ext cx="3077885" cy="345009"/>
+            <a:off x="471488" y="8475138"/>
+            <a:ext cx="1543050" cy="486833"/>
           </a:xfrm>
           <a:prstGeom prst="rect">
             <a:avLst/>
@@ -10056,8 +10056,8 @@
         </p:nvSpPr>
         <p:spPr>
           <a:xfrm>
-            <a:off x="4531331" y="6006165"/>
-            <a:ext cx="4616826" cy="345009"/>
+            <a:off x="2271713" y="8475138"/>
+            <a:ext cx="2314574" cy="486833"/>
           </a:xfrm>
           <a:prstGeom prst="rect">
             <a:avLst/>
@@ -10189,8 +10189,8 @@
         </p:nvSpPr>
         <p:spPr>
           <a:xfrm>
-            <a:off x="9661140" y="6006165"/>
-            <a:ext cx="3077885" cy="345009"/>
+            <a:off x="4843464" y="8475138"/>
+            <a:ext cx="1543050" cy="486833"/>
           </a:xfrm>
           <a:prstGeom prst="rect">
             <a:avLst/>
@@ -10324,8 +10324,8 @@
         </p:nvSpPr>
         <p:spPr>
           <a:xfrm>
-            <a:off x="940467" y="345014"/>
-            <a:ext cx="11798558" cy="1252533"/>
+            <a:off x="471489" y="486840"/>
+            <a:ext cx="5915025" cy="1767416"/>
           </a:xfrm>
           <a:prstGeom prst="rect">
             <a:avLst/>
@@ -10472,8 +10472,8 @@
         </p:nvSpPr>
         <p:spPr>
           <a:xfrm>
-            <a:off x="940467" y="1725048"/>
-            <a:ext cx="11798558" cy="4111612"/>
+            <a:off x="471489" y="2434169"/>
+            <a:ext cx="5915025" cy="5801785"/>
           </a:xfrm>
           <a:prstGeom prst="rect">
             <a:avLst/>
@@ -10740,8 +10740,8 @@
         </p:nvSpPr>
         <p:spPr>
           <a:xfrm>
-            <a:off x="940466" y="6006165"/>
-            <a:ext cx="3077885" cy="345009"/>
+            <a:off x="471488" y="8475138"/>
+            <a:ext cx="1543050" cy="486833"/>
           </a:xfrm>
           <a:prstGeom prst="rect">
             <a:avLst/>
@@ -10765,7 +10765,7 @@
               </a:spcAft>
               <a:buSzPts val="1400"/>
               <a:buNone/>
-              <a:defRPr sz="1473" b="0" i="0" u="none" strike="noStrike" cap="none">
+              <a:defRPr sz="738" b="0" i="0" u="none" strike="noStrike" cap="none">
                 <a:solidFill>
                   <a:srgbClr val="757575"/>
                 </a:solidFill>
@@ -10784,7 +10784,7 @@
               </a:spcAft>
               <a:buSzPts val="1400"/>
               <a:buNone/>
-              <a:defRPr sz="2160" b="0" i="0" u="none" strike="noStrike" cap="none">
+              <a:defRPr sz="1083" b="0" i="0" u="none" strike="noStrike" cap="none">
                 <a:solidFill>
                   <a:schemeClr val="dk1"/>
                 </a:solidFill>
@@ -10803,7 +10803,7 @@
               </a:spcAft>
               <a:buSzPts val="1400"/>
               <a:buNone/>
-              <a:defRPr sz="2160" b="0" i="0" u="none" strike="noStrike" cap="none">
+              <a:defRPr sz="1083" b="0" i="0" u="none" strike="noStrike" cap="none">
                 <a:solidFill>
                   <a:schemeClr val="dk1"/>
                 </a:solidFill>
@@ -10822,7 +10822,7 @@
               </a:spcAft>
               <a:buSzPts val="1400"/>
               <a:buNone/>
-              <a:defRPr sz="2160" b="0" i="0" u="none" strike="noStrike" cap="none">
+              <a:defRPr sz="1083" b="0" i="0" u="none" strike="noStrike" cap="none">
                 <a:solidFill>
                   <a:schemeClr val="dk1"/>
                 </a:solidFill>
@@ -10841,7 +10841,7 @@
               </a:spcAft>
               <a:buSzPts val="1400"/>
               <a:buNone/>
-              <a:defRPr sz="2160" b="0" i="0" u="none" strike="noStrike" cap="none">
+              <a:defRPr sz="1083" b="0" i="0" u="none" strike="noStrike" cap="none">
                 <a:solidFill>
                   <a:schemeClr val="dk1"/>
                 </a:solidFill>
@@ -10860,7 +10860,7 @@
               </a:spcAft>
               <a:buSzPts val="1400"/>
               <a:buNone/>
-              <a:defRPr sz="2160" b="0" i="0" u="none" strike="noStrike" cap="none">
+              <a:defRPr sz="1083" b="0" i="0" u="none" strike="noStrike" cap="none">
                 <a:solidFill>
                   <a:schemeClr val="dk1"/>
                 </a:solidFill>
@@ -10879,7 +10879,7 @@
               </a:spcAft>
               <a:buSzPts val="1400"/>
               <a:buNone/>
-              <a:defRPr sz="2160" b="0" i="0" u="none" strike="noStrike" cap="none">
+              <a:defRPr sz="1083" b="0" i="0" u="none" strike="noStrike" cap="none">
                 <a:solidFill>
                   <a:schemeClr val="dk1"/>
                 </a:solidFill>
@@ -10898,7 +10898,7 @@
               </a:spcAft>
               <a:buSzPts val="1400"/>
               <a:buNone/>
-              <a:defRPr sz="2160" b="0" i="0" u="none" strike="noStrike" cap="none">
+              <a:defRPr sz="1083" b="0" i="0" u="none" strike="noStrike" cap="none">
                 <a:solidFill>
                   <a:schemeClr val="dk1"/>
                 </a:solidFill>
@@ -10917,7 +10917,7 @@
               </a:spcAft>
               <a:buSzPts val="1400"/>
               <a:buNone/>
-              <a:defRPr sz="2160" b="0" i="0" u="none" strike="noStrike" cap="none">
+              <a:defRPr sz="1083" b="0" i="0" u="none" strike="noStrike" cap="none">
                 <a:solidFill>
                   <a:schemeClr val="dk1"/>
                 </a:solidFill>
@@ -10945,8 +10945,8 @@
         </p:nvSpPr>
         <p:spPr>
           <a:xfrm>
-            <a:off x="4531331" y="6006165"/>
-            <a:ext cx="4616826" cy="345009"/>
+            <a:off x="2271713" y="8475138"/>
+            <a:ext cx="2314574" cy="486833"/>
           </a:xfrm>
           <a:prstGeom prst="rect">
             <a:avLst/>
@@ -10970,7 +10970,7 @@
               </a:spcAft>
               <a:buSzPts val="1400"/>
               <a:buNone/>
-              <a:defRPr sz="1473" b="0" i="0" u="none" strike="noStrike" cap="none">
+              <a:defRPr sz="738" b="0" i="0" u="none" strike="noStrike" cap="none">
                 <a:solidFill>
                   <a:srgbClr val="757575"/>
                 </a:solidFill>
@@ -10989,7 +10989,7 @@
               </a:spcAft>
               <a:buSzPts val="1400"/>
               <a:buNone/>
-              <a:defRPr sz="2160" b="0" i="0" u="none" strike="noStrike" cap="none">
+              <a:defRPr sz="1083" b="0" i="0" u="none" strike="noStrike" cap="none">
                 <a:solidFill>
                   <a:schemeClr val="dk1"/>
                 </a:solidFill>
@@ -11008,7 +11008,7 @@
               </a:spcAft>
               <a:buSzPts val="1400"/>
               <a:buNone/>
-              <a:defRPr sz="2160" b="0" i="0" u="none" strike="noStrike" cap="none">
+              <a:defRPr sz="1083" b="0" i="0" u="none" strike="noStrike" cap="none">
                 <a:solidFill>
                   <a:schemeClr val="dk1"/>
                 </a:solidFill>
@@ -11027,7 +11027,7 @@
               </a:spcAft>
               <a:buSzPts val="1400"/>
               <a:buNone/>
-              <a:defRPr sz="2160" b="0" i="0" u="none" strike="noStrike" cap="none">
+              <a:defRPr sz="1083" b="0" i="0" u="none" strike="noStrike" cap="none">
                 <a:solidFill>
                   <a:schemeClr val="dk1"/>
                 </a:solidFill>
@@ -11046,7 +11046,7 @@
               </a:spcAft>
               <a:buSzPts val="1400"/>
               <a:buNone/>
-              <a:defRPr sz="2160" b="0" i="0" u="none" strike="noStrike" cap="none">
+              <a:defRPr sz="1083" b="0" i="0" u="none" strike="noStrike" cap="none">
                 <a:solidFill>
                   <a:schemeClr val="dk1"/>
                 </a:solidFill>
@@ -11065,7 +11065,7 @@
               </a:spcAft>
               <a:buSzPts val="1400"/>
               <a:buNone/>
-              <a:defRPr sz="2160" b="0" i="0" u="none" strike="noStrike" cap="none">
+              <a:defRPr sz="1083" b="0" i="0" u="none" strike="noStrike" cap="none">
                 <a:solidFill>
                   <a:schemeClr val="dk1"/>
                 </a:solidFill>
@@ -11084,7 +11084,7 @@
               </a:spcAft>
               <a:buSzPts val="1400"/>
               <a:buNone/>
-              <a:defRPr sz="2160" b="0" i="0" u="none" strike="noStrike" cap="none">
+              <a:defRPr sz="1083" b="0" i="0" u="none" strike="noStrike" cap="none">
                 <a:solidFill>
                   <a:schemeClr val="dk1"/>
                 </a:solidFill>
@@ -11103,7 +11103,7 @@
               </a:spcAft>
               <a:buSzPts val="1400"/>
               <a:buNone/>
-              <a:defRPr sz="2160" b="0" i="0" u="none" strike="noStrike" cap="none">
+              <a:defRPr sz="1083" b="0" i="0" u="none" strike="noStrike" cap="none">
                 <a:solidFill>
                   <a:schemeClr val="dk1"/>
                 </a:solidFill>
@@ -11122,7 +11122,7 @@
               </a:spcAft>
               <a:buSzPts val="1400"/>
               <a:buNone/>
-              <a:defRPr sz="2160" b="0" i="0" u="none" strike="noStrike" cap="none">
+              <a:defRPr sz="1083" b="0" i="0" u="none" strike="noStrike" cap="none">
                 <a:solidFill>
                   <a:schemeClr val="dk1"/>
                 </a:solidFill>
@@ -11150,8 +11150,8 @@
         </p:nvSpPr>
         <p:spPr>
           <a:xfrm>
-            <a:off x="9661140" y="6006165"/>
-            <a:ext cx="3077885" cy="345009"/>
+            <a:off x="4843464" y="8475138"/>
+            <a:ext cx="1543050" cy="486833"/>
           </a:xfrm>
           <a:prstGeom prst="rect">
             <a:avLst/>
@@ -11171,7 +11171,7 @@
                 <a:spcPts val="0"/>
               </a:spcBef>
               <a:buNone/>
-              <a:defRPr sz="1473" b="0" i="0" u="none" strike="noStrike" cap="none">
+              <a:defRPr sz="738" b="0" i="0" u="none" strike="noStrike" cap="none">
                 <a:solidFill>
                   <a:srgbClr val="757575"/>
                 </a:solidFill>
@@ -11186,7 +11186,7 @@
                 <a:spcPts val="0"/>
               </a:spcBef>
               <a:buNone/>
-              <a:defRPr sz="1473" b="0" i="0" u="none" strike="noStrike" cap="none">
+              <a:defRPr sz="738" b="0" i="0" u="none" strike="noStrike" cap="none">
                 <a:solidFill>
                   <a:srgbClr val="757575"/>
                 </a:solidFill>
@@ -11201,7 +11201,7 @@
                 <a:spcPts val="0"/>
               </a:spcBef>
               <a:buNone/>
-              <a:defRPr sz="1473" b="0" i="0" u="none" strike="noStrike" cap="none">
+              <a:defRPr sz="738" b="0" i="0" u="none" strike="noStrike" cap="none">
                 <a:solidFill>
                   <a:srgbClr val="757575"/>
                 </a:solidFill>
@@ -11216,7 +11216,7 @@
                 <a:spcPts val="0"/>
               </a:spcBef>
               <a:buNone/>
-              <a:defRPr sz="1473" b="0" i="0" u="none" strike="noStrike" cap="none">
+              <a:defRPr sz="738" b="0" i="0" u="none" strike="noStrike" cap="none">
                 <a:solidFill>
                   <a:srgbClr val="757575"/>
                 </a:solidFill>
@@ -11231,7 +11231,7 @@
                 <a:spcPts val="0"/>
               </a:spcBef>
               <a:buNone/>
-              <a:defRPr sz="1473" b="0" i="0" u="none" strike="noStrike" cap="none">
+              <a:defRPr sz="738" b="0" i="0" u="none" strike="noStrike" cap="none">
                 <a:solidFill>
                   <a:srgbClr val="757575"/>
                 </a:solidFill>
@@ -11246,7 +11246,7 @@
                 <a:spcPts val="0"/>
               </a:spcBef>
               <a:buNone/>
-              <a:defRPr sz="1473" b="0" i="0" u="none" strike="noStrike" cap="none">
+              <a:defRPr sz="738" b="0" i="0" u="none" strike="noStrike" cap="none">
                 <a:solidFill>
                   <a:srgbClr val="757575"/>
                 </a:solidFill>
@@ -11261,7 +11261,7 @@
                 <a:spcPts val="0"/>
               </a:spcBef>
               <a:buNone/>
-              <a:defRPr sz="1473" b="0" i="0" u="none" strike="noStrike" cap="none">
+              <a:defRPr sz="738" b="0" i="0" u="none" strike="noStrike" cap="none">
                 <a:solidFill>
                   <a:srgbClr val="757575"/>
                 </a:solidFill>
@@ -11276,7 +11276,7 @@
                 <a:spcPts val="0"/>
               </a:spcBef>
               <a:buNone/>
-              <a:defRPr sz="1473" b="0" i="0" u="none" strike="noStrike" cap="none">
+              <a:defRPr sz="738" b="0" i="0" u="none" strike="noStrike" cap="none">
                 <a:solidFill>
                   <a:srgbClr val="757575"/>
                 </a:solidFill>
@@ -11291,7 +11291,7 @@
                 <a:spcPts val="0"/>
               </a:spcBef>
               <a:buNone/>
-              <a:defRPr sz="1473" b="0" i="0" u="none" strike="noStrike" cap="none">
+              <a:defRPr sz="738" b="0" i="0" u="none" strike="noStrike" cap="none">
                 <a:solidFill>
                   <a:srgbClr val="757575"/>
                 </a:solidFill>
@@ -11356,7 +11356,7 @@
           <a:srgbClr val="000000"/>
         </a:buClr>
         <a:buFont typeface="Arial"/>
-        <a:defRPr sz="1680" b="0" i="0" u="none" strike="noStrike" cap="none">
+        <a:defRPr sz="842" b="0" i="0" u="none" strike="noStrike" cap="none">
           <a:solidFill>
             <a:srgbClr val="000000"/>
           </a:solidFill>
@@ -11380,7 +11380,7 @@
           <a:srgbClr val="000000"/>
         </a:buClr>
         <a:buFont typeface="Arial"/>
-        <a:defRPr sz="1680" b="0" i="0" u="none" strike="noStrike" cap="none">
+        <a:defRPr sz="842" b="0" i="0" u="none" strike="noStrike" cap="none">
           <a:solidFill>
             <a:srgbClr val="000000"/>
           </a:solidFill>
@@ -11404,7 +11404,7 @@
           <a:srgbClr val="000000"/>
         </a:buClr>
         <a:buFont typeface="Arial"/>
-        <a:defRPr sz="1680" b="0" i="0" u="none" strike="noStrike" cap="none">
+        <a:defRPr sz="842" b="0" i="0" u="none" strike="noStrike" cap="none">
           <a:solidFill>
             <a:srgbClr val="000000"/>
           </a:solidFill>
@@ -11428,7 +11428,7 @@
           <a:srgbClr val="000000"/>
         </a:buClr>
         <a:buFont typeface="Arial"/>
-        <a:defRPr sz="1680" b="0" i="0" u="none" strike="noStrike" cap="none">
+        <a:defRPr sz="842" b="0" i="0" u="none" strike="noStrike" cap="none">
           <a:solidFill>
             <a:srgbClr val="000000"/>
           </a:solidFill>
@@ -11452,7 +11452,7 @@
           <a:srgbClr val="000000"/>
         </a:buClr>
         <a:buFont typeface="Arial"/>
-        <a:defRPr sz="1680" b="0" i="0" u="none" strike="noStrike" cap="none">
+        <a:defRPr sz="842" b="0" i="0" u="none" strike="noStrike" cap="none">
           <a:solidFill>
             <a:srgbClr val="000000"/>
           </a:solidFill>
@@ -11476,7 +11476,7 @@
           <a:srgbClr val="000000"/>
         </a:buClr>
         <a:buFont typeface="Arial"/>
-        <a:defRPr sz="1680" b="0" i="0" u="none" strike="noStrike" cap="none">
+        <a:defRPr sz="842" b="0" i="0" u="none" strike="noStrike" cap="none">
           <a:solidFill>
             <a:srgbClr val="000000"/>
           </a:solidFill>
@@ -11500,7 +11500,7 @@
           <a:srgbClr val="000000"/>
         </a:buClr>
         <a:buFont typeface="Arial"/>
-        <a:defRPr sz="1680" b="0" i="0" u="none" strike="noStrike" cap="none">
+        <a:defRPr sz="842" b="0" i="0" u="none" strike="noStrike" cap="none">
           <a:solidFill>
             <a:srgbClr val="000000"/>
           </a:solidFill>
@@ -11524,7 +11524,7 @@
           <a:srgbClr val="000000"/>
         </a:buClr>
         <a:buFont typeface="Arial"/>
-        <a:defRPr sz="1680" b="0" i="0" u="none" strike="noStrike" cap="none">
+        <a:defRPr sz="842" b="0" i="0" u="none" strike="noStrike" cap="none">
           <a:solidFill>
             <a:srgbClr val="000000"/>
           </a:solidFill>
@@ -11548,7 +11548,7 @@
           <a:srgbClr val="000000"/>
         </a:buClr>
         <a:buFont typeface="Arial"/>
-        <a:defRPr sz="1680" b="0" i="0" u="none" strike="noStrike" cap="none">
+        <a:defRPr sz="842" b="0" i="0" u="none" strike="noStrike" cap="none">
           <a:solidFill>
             <a:srgbClr val="000000"/>
           </a:solidFill>
@@ -11585,7 +11585,7 @@
           <a:srgbClr val="000000"/>
         </a:buClr>
         <a:buFont typeface="Arial"/>
-        <a:defRPr sz="1680" b="0" i="0" u="none" strike="noStrike" cap="none">
+        <a:defRPr sz="842" b="0" i="0" u="none" strike="noStrike" cap="none">
           <a:solidFill>
             <a:srgbClr val="000000"/>
           </a:solidFill>
@@ -11609,7 +11609,7 @@
           <a:srgbClr val="000000"/>
         </a:buClr>
         <a:buFont typeface="Arial"/>
-        <a:defRPr sz="1680" b="0" i="0" u="none" strike="noStrike" cap="none">
+        <a:defRPr sz="842" b="0" i="0" u="none" strike="noStrike" cap="none">
           <a:solidFill>
             <a:srgbClr val="000000"/>
           </a:solidFill>
@@ -11633,7 +11633,7 @@
           <a:srgbClr val="000000"/>
         </a:buClr>
         <a:buFont typeface="Arial"/>
-        <a:defRPr sz="1680" b="0" i="0" u="none" strike="noStrike" cap="none">
+        <a:defRPr sz="842" b="0" i="0" u="none" strike="noStrike" cap="none">
           <a:solidFill>
             <a:srgbClr val="000000"/>
           </a:solidFill>
@@ -11657,7 +11657,7 @@
           <a:srgbClr val="000000"/>
         </a:buClr>
         <a:buFont typeface="Arial"/>
-        <a:defRPr sz="1680" b="0" i="0" u="none" strike="noStrike" cap="none">
+        <a:defRPr sz="842" b="0" i="0" u="none" strike="noStrike" cap="none">
           <a:solidFill>
             <a:srgbClr val="000000"/>
           </a:solidFill>
@@ -11681,7 +11681,7 @@
           <a:srgbClr val="000000"/>
         </a:buClr>
         <a:buFont typeface="Arial"/>
-        <a:defRPr sz="1680" b="0" i="0" u="none" strike="noStrike" cap="none">
+        <a:defRPr sz="842" b="0" i="0" u="none" strike="noStrike" cap="none">
           <a:solidFill>
             <a:srgbClr val="000000"/>
           </a:solidFill>
@@ -11705,7 +11705,7 @@
           <a:srgbClr val="000000"/>
         </a:buClr>
         <a:buFont typeface="Arial"/>
-        <a:defRPr sz="1680" b="0" i="0" u="none" strike="noStrike" cap="none">
+        <a:defRPr sz="842" b="0" i="0" u="none" strike="noStrike" cap="none">
           <a:solidFill>
             <a:srgbClr val="000000"/>
           </a:solidFill>
@@ -11729,7 +11729,7 @@
           <a:srgbClr val="000000"/>
         </a:buClr>
         <a:buFont typeface="Arial"/>
-        <a:defRPr sz="1680" b="0" i="0" u="none" strike="noStrike" cap="none">
+        <a:defRPr sz="842" b="0" i="0" u="none" strike="noStrike" cap="none">
           <a:solidFill>
             <a:srgbClr val="000000"/>
           </a:solidFill>
@@ -11753,7 +11753,7 @@
           <a:srgbClr val="000000"/>
         </a:buClr>
         <a:buFont typeface="Arial"/>
-        <a:defRPr sz="1680" b="0" i="0" u="none" strike="noStrike" cap="none">
+        <a:defRPr sz="842" b="0" i="0" u="none" strike="noStrike" cap="none">
           <a:solidFill>
             <a:srgbClr val="000000"/>
           </a:solidFill>
@@ -11777,7 +11777,7 @@
           <a:srgbClr val="000000"/>
         </a:buClr>
         <a:buFont typeface="Arial"/>
-        <a:defRPr sz="1680" b="0" i="0" u="none" strike="noStrike" cap="none">
+        <a:defRPr sz="842" b="0" i="0" u="none" strike="noStrike" cap="none">
           <a:solidFill>
             <a:srgbClr val="000000"/>
           </a:solidFill>
@@ -11814,7 +11814,7 @@
           <a:srgbClr val="000000"/>
         </a:buClr>
         <a:buFont typeface="Arial"/>
-        <a:defRPr sz="1680" b="0" i="0" u="none" strike="noStrike" cap="none">
+        <a:defRPr sz="842" b="0" i="0" u="none" strike="noStrike" cap="none">
           <a:solidFill>
             <a:srgbClr val="000000"/>
           </a:solidFill>
@@ -11838,7 +11838,7 @@
           <a:srgbClr val="000000"/>
         </a:buClr>
         <a:buFont typeface="Arial"/>
-        <a:defRPr sz="1680" b="0" i="0" u="none" strike="noStrike" cap="none">
+        <a:defRPr sz="842" b="0" i="0" u="none" strike="noStrike" cap="none">
           <a:solidFill>
             <a:srgbClr val="000000"/>
           </a:solidFill>
@@ -11862,7 +11862,7 @@
           <a:srgbClr val="000000"/>
         </a:buClr>
         <a:buFont typeface="Arial"/>
-        <a:defRPr sz="1680" b="0" i="0" u="none" strike="noStrike" cap="none">
+        <a:defRPr sz="842" b="0" i="0" u="none" strike="noStrike" cap="none">
           <a:solidFill>
             <a:srgbClr val="000000"/>
           </a:solidFill>
@@ -11886,7 +11886,7 @@
           <a:srgbClr val="000000"/>
         </a:buClr>
         <a:buFont typeface="Arial"/>
-        <a:defRPr sz="1680" b="0" i="0" u="none" strike="noStrike" cap="none">
+        <a:defRPr sz="842" b="0" i="0" u="none" strike="noStrike" cap="none">
           <a:solidFill>
             <a:srgbClr val="000000"/>
           </a:solidFill>
@@ -11910,7 +11910,7 @@
           <a:srgbClr val="000000"/>
         </a:buClr>
         <a:buFont typeface="Arial"/>
-        <a:defRPr sz="1680" b="0" i="0" u="none" strike="noStrike" cap="none">
+        <a:defRPr sz="842" b="0" i="0" u="none" strike="noStrike" cap="none">
           <a:solidFill>
             <a:srgbClr val="000000"/>
           </a:solidFill>
@@ -11934,7 +11934,7 @@
           <a:srgbClr val="000000"/>
         </a:buClr>
         <a:buFont typeface="Arial"/>
-        <a:defRPr sz="1680" b="0" i="0" u="none" strike="noStrike" cap="none">
+        <a:defRPr sz="842" b="0" i="0" u="none" strike="noStrike" cap="none">
           <a:solidFill>
             <a:srgbClr val="000000"/>
           </a:solidFill>
@@ -11958,7 +11958,7 @@
           <a:srgbClr val="000000"/>
         </a:buClr>
         <a:buFont typeface="Arial"/>
-        <a:defRPr sz="1680" b="0" i="0" u="none" strike="noStrike" cap="none">
+        <a:defRPr sz="842" b="0" i="0" u="none" strike="noStrike" cap="none">
           <a:solidFill>
             <a:srgbClr val="000000"/>
           </a:solidFill>
@@ -11982,7 +11982,7 @@
           <a:srgbClr val="000000"/>
         </a:buClr>
         <a:buFont typeface="Arial"/>
-        <a:defRPr sz="1680" b="0" i="0" u="none" strike="noStrike" cap="none">
+        <a:defRPr sz="842" b="0" i="0" u="none" strike="noStrike" cap="none">
           <a:solidFill>
             <a:srgbClr val="000000"/>
           </a:solidFill>
@@ -12006,7 +12006,7 @@
           <a:srgbClr val="000000"/>
         </a:buClr>
         <a:buFont typeface="Arial"/>
-        <a:defRPr sz="1680" b="0" i="0" u="none" strike="noStrike" cap="none">
+        <a:defRPr sz="842" b="0" i="0" u="none" strike="noStrike" cap="none">
           <a:solidFill>
             <a:srgbClr val="000000"/>
           </a:solidFill>
@@ -12040,10 +12040,10 @@
       </p:grpSpPr>
       <p:pic>
         <p:nvPicPr>
-          <p:cNvPr id="10" name="Picture 9">
+          <p:cNvPr id="50" name="Picture 49">
             <a:extLst>
               <a:ext uri="{FF2B5EF4-FFF2-40B4-BE49-F238E27FC236}">
-                <a16:creationId xmlns:a16="http://schemas.microsoft.com/office/drawing/2014/main" id="{E6433341-3236-782D-0064-8FDEE47EEA3A}"/>
+                <a16:creationId xmlns:a16="http://schemas.microsoft.com/office/drawing/2014/main" id="{B2031751-96DE-08A9-9F5C-538098D6D0D8}"/>
               </a:ext>
             </a:extLst>
           </p:cNvPr>
@@ -12054,15 +12054,14 @@
         </p:nvPicPr>
         <p:blipFill>
           <a:blip r:embed="rId3"/>
-          <a:srcRect l="49174" t="54686"/>
           <a:stretch>
             <a:fillRect/>
           </a:stretch>
         </p:blipFill>
         <p:spPr>
           <a:xfrm>
-            <a:off x="7088103" y="527584"/>
-            <a:ext cx="3098573" cy="1941540"/>
+            <a:off x="4526466" y="26691"/>
+            <a:ext cx="2331534" cy="2029521"/>
           </a:xfrm>
           <a:prstGeom prst="rect">
             <a:avLst/>
@@ -12071,10 +12070,10 @@
       </p:pic>
       <p:pic>
         <p:nvPicPr>
-          <p:cNvPr id="7" name="Picture 6">
+          <p:cNvPr id="45" name="Picture 44">
             <a:extLst>
               <a:ext uri="{FF2B5EF4-FFF2-40B4-BE49-F238E27FC236}">
-                <a16:creationId xmlns:a16="http://schemas.microsoft.com/office/drawing/2014/main" id="{32D4203C-4DBA-E614-B24C-DE1886C6FBF6}"/>
+                <a16:creationId xmlns:a16="http://schemas.microsoft.com/office/drawing/2014/main" id="{BD578DDA-BCD5-2AB7-027F-524E12B861D4}"/>
               </a:ext>
             </a:extLst>
           </p:cNvPr>
@@ -12091,8 +12090,8 @@
         </p:blipFill>
         <p:spPr>
           <a:xfrm>
-            <a:off x="10222880" y="225753"/>
-            <a:ext cx="3456608" cy="2541623"/>
+            <a:off x="2436565" y="2237204"/>
+            <a:ext cx="3899563" cy="2299107"/>
           </a:xfrm>
           <a:prstGeom prst="rect">
             <a:avLst/>
@@ -12101,10 +12100,10 @@
       </p:pic>
       <p:pic>
         <p:nvPicPr>
-          <p:cNvPr id="41" name="Picture 40">
+          <p:cNvPr id="3" name="Picture 2">
             <a:extLst>
               <a:ext uri="{FF2B5EF4-FFF2-40B4-BE49-F238E27FC236}">
-                <a16:creationId xmlns:a16="http://schemas.microsoft.com/office/drawing/2014/main" id="{408E8791-1D9E-933B-45D4-073439EDF4A2}"/>
+                <a16:creationId xmlns:a16="http://schemas.microsoft.com/office/drawing/2014/main" id="{74C5099E-6400-812B-888E-60F57888ADAF}"/>
               </a:ext>
             </a:extLst>
           </p:cNvPr>
@@ -12115,14 +12114,15 @@
         </p:nvPicPr>
         <p:blipFill>
           <a:blip r:embed="rId5"/>
+          <a:srcRect l="5134"/>
           <a:stretch>
             <a:fillRect/>
           </a:stretch>
         </p:blipFill>
         <p:spPr>
           <a:xfrm>
-            <a:off x="-8137" y="71264"/>
-            <a:ext cx="3397828" cy="5656384"/>
+            <a:off x="14731" y="71263"/>
+            <a:ext cx="2384866" cy="4184969"/>
           </a:xfrm>
           <a:prstGeom prst="rect">
             <a:avLst/>
@@ -12131,10 +12131,10 @@
       </p:pic>
       <p:sp>
         <p:nvSpPr>
-          <p:cNvPr id="42" name="Google Shape;90;p1">
+          <p:cNvPr id="5" name="Google Shape;92;p1">
             <a:extLst>
               <a:ext uri="{FF2B5EF4-FFF2-40B4-BE49-F238E27FC236}">
-                <a16:creationId xmlns:a16="http://schemas.microsoft.com/office/drawing/2014/main" id="{106F5841-A894-C1FA-323C-F3DB12FD8C13}"/>
+                <a16:creationId xmlns:a16="http://schemas.microsoft.com/office/drawing/2014/main" id="{2B07435F-59F1-BDCA-69B0-DB8CCA47DE9F}"/>
               </a:ext>
             </a:extLst>
           </p:cNvPr>
@@ -12143,8 +12143,8 @@
         </p:nvSpPr>
         <p:spPr>
           <a:xfrm>
-            <a:off x="3738831" y="2201"/>
-            <a:ext cx="815546" cy="369332"/>
+            <a:off x="-35264" y="2201"/>
+            <a:ext cx="815546" cy="276959"/>
           </a:xfrm>
           <a:prstGeom prst="rect">
             <a:avLst/>
@@ -12170,7 +12170,7 @@
               <a:buNone/>
             </a:pPr>
             <a:r>
-              <a:rPr lang="en-CA" sz="1800" b="0" i="0" u="none" strike="noStrike" cap="none" dirty="0">
+              <a:rPr lang="en-CA" sz="1200" b="1" dirty="0">
                 <a:solidFill>
                   <a:schemeClr val="dk1"/>
                 </a:solidFill>
@@ -12179,18 +12179,18 @@
                 <a:cs typeface="Arial"/>
                 <a:sym typeface="Arial"/>
               </a:rPr>
-              <a:t>b</a:t>
+              <a:t>a</a:t>
             </a:r>
-            <a:endParaRPr dirty="0"/>
+            <a:endParaRPr sz="1200" b="1" dirty="0"/>
           </a:p>
         </p:txBody>
       </p:sp>
       <p:sp>
         <p:nvSpPr>
-          <p:cNvPr id="43" name="Google Shape;92;p1">
+          <p:cNvPr id="31" name="Google Shape;91;p1">
             <a:extLst>
               <a:ext uri="{FF2B5EF4-FFF2-40B4-BE49-F238E27FC236}">
-                <a16:creationId xmlns:a16="http://schemas.microsoft.com/office/drawing/2014/main" id="{E6974FDC-9A5D-B262-01CC-2AD4FFB561A4}"/>
+                <a16:creationId xmlns:a16="http://schemas.microsoft.com/office/drawing/2014/main" id="{5505695E-F5AE-9D8A-F41C-1179427E81A1}"/>
               </a:ext>
             </a:extLst>
           </p:cNvPr>
@@ -12199,8 +12199,8 @@
         </p:nvSpPr>
         <p:spPr>
           <a:xfrm>
-            <a:off x="-35264" y="2201"/>
-            <a:ext cx="815546" cy="369332"/>
+            <a:off x="4330154" y="-1"/>
+            <a:ext cx="815546" cy="276959"/>
           </a:xfrm>
           <a:prstGeom prst="rect">
             <a:avLst/>
@@ -12226,27 +12226,23 @@
               <a:buNone/>
             </a:pPr>
             <a:r>
-              <a:rPr lang="en-CA" sz="1800" dirty="0">
+              <a:rPr lang="en-CA" sz="1200" b="1" dirty="0">
                 <a:solidFill>
                   <a:schemeClr val="dk1"/>
                 </a:solidFill>
-                <a:latin typeface="Arial"/>
-                <a:ea typeface="Arial"/>
-                <a:cs typeface="Arial"/>
-                <a:sym typeface="Arial"/>
               </a:rPr>
-              <a:t>a</a:t>
+              <a:t>c</a:t>
             </a:r>
-            <a:endParaRPr dirty="0"/>
+            <a:endParaRPr sz="1200" b="1" dirty="0"/>
           </a:p>
         </p:txBody>
       </p:sp>
       <p:sp>
         <p:nvSpPr>
-          <p:cNvPr id="46" name="Google Shape;91;p1">
+          <p:cNvPr id="6" name="Google Shape;91;p1">
             <a:extLst>
               <a:ext uri="{FF2B5EF4-FFF2-40B4-BE49-F238E27FC236}">
-                <a16:creationId xmlns:a16="http://schemas.microsoft.com/office/drawing/2014/main" id="{5B4E6A1E-ED9F-1F7B-4D79-8F7B578FC13D}"/>
+                <a16:creationId xmlns:a16="http://schemas.microsoft.com/office/drawing/2014/main" id="{F2DAA45E-F8B3-3AAD-23A5-1A2523806084}"/>
               </a:ext>
             </a:extLst>
           </p:cNvPr>
@@ -12255,8 +12251,8 @@
         </p:nvSpPr>
         <p:spPr>
           <a:xfrm>
-            <a:off x="10157007" y="2242"/>
-            <a:ext cx="815546" cy="369291"/>
+            <a:off x="2184020" y="2098724"/>
+            <a:ext cx="815546" cy="276959"/>
           </a:xfrm>
           <a:prstGeom prst="rect">
             <a:avLst/>
@@ -12282,23 +12278,53 @@
               <a:buNone/>
             </a:pPr>
             <a:r>
-              <a:rPr lang="en-CA" sz="1800" dirty="0">
+              <a:rPr lang="en-CA" sz="1200" b="1" dirty="0">
                 <a:solidFill>
                   <a:schemeClr val="dk1"/>
                 </a:solidFill>
               </a:rPr>
               <a:t>d</a:t>
             </a:r>
-            <a:endParaRPr dirty="0"/>
+            <a:endParaRPr sz="1200" b="1" dirty="0"/>
           </a:p>
         </p:txBody>
       </p:sp>
+      <p:pic>
+        <p:nvPicPr>
+          <p:cNvPr id="40" name="Picture 39">
+            <a:extLst>
+              <a:ext uri="{FF2B5EF4-FFF2-40B4-BE49-F238E27FC236}">
+                <a16:creationId xmlns:a16="http://schemas.microsoft.com/office/drawing/2014/main" id="{0403F0BB-4362-4CA8-46E7-AA1ADD5560C9}"/>
+              </a:ext>
+            </a:extLst>
+          </p:cNvPr>
+          <p:cNvPicPr>
+            <a:picLocks noChangeAspect="1"/>
+          </p:cNvPicPr>
+          <p:nvPr/>
+        </p:nvPicPr>
+        <p:blipFill>
+          <a:blip r:embed="rId6"/>
+          <a:stretch>
+            <a:fillRect/>
+          </a:stretch>
+        </p:blipFill>
+        <p:spPr>
+          <a:xfrm>
+            <a:off x="2337254" y="106800"/>
+            <a:ext cx="1955932" cy="1949412"/>
+          </a:xfrm>
+          <a:prstGeom prst="rect">
+            <a:avLst/>
+          </a:prstGeom>
+        </p:spPr>
+      </p:pic>
       <p:sp>
         <p:nvSpPr>
-          <p:cNvPr id="47" name="Google Shape;91;p1">
+          <p:cNvPr id="4" name="Google Shape;90;p1">
             <a:extLst>
               <a:ext uri="{FF2B5EF4-FFF2-40B4-BE49-F238E27FC236}">
-                <a16:creationId xmlns:a16="http://schemas.microsoft.com/office/drawing/2014/main" id="{6798A099-F8BD-8EAE-ADCE-8B0785DC6D94}"/>
+                <a16:creationId xmlns:a16="http://schemas.microsoft.com/office/drawing/2014/main" id="{47019256-A2AB-9B69-9C12-F4B377E90B6C}"/>
               </a:ext>
             </a:extLst>
           </p:cNvPr>
@@ -12307,8 +12333,8 @@
         </p:nvSpPr>
         <p:spPr>
           <a:xfrm>
-            <a:off x="6947919" y="2201"/>
-            <a:ext cx="815546" cy="369332"/>
+            <a:off x="2184020" y="0"/>
+            <a:ext cx="815546" cy="276959"/>
           </a:xfrm>
           <a:prstGeom prst="rect">
             <a:avLst/>
@@ -12334,7 +12360,7 @@
               <a:buNone/>
             </a:pPr>
             <a:r>
-              <a:rPr lang="en-CA" sz="1800" dirty="0">
+              <a:rPr lang="en-CA" sz="1200" b="1" i="0" u="none" strike="noStrike" cap="none" dirty="0">
                 <a:solidFill>
                   <a:schemeClr val="dk1"/>
                 </a:solidFill>
@@ -12343,18 +12369,18 @@
                 <a:cs typeface="Arial"/>
                 <a:sym typeface="Arial"/>
               </a:rPr>
-              <a:t>c</a:t>
+              <a:t>b</a:t>
             </a:r>
-            <a:endParaRPr dirty="0"/>
+            <a:endParaRPr sz="1200" b="1" dirty="0"/>
           </a:p>
         </p:txBody>
       </p:sp>
       <p:sp>
         <p:nvSpPr>
-          <p:cNvPr id="48" name="Google Shape;91;p1">
+          <p:cNvPr id="51" name="TextBox 50">
             <a:extLst>
               <a:ext uri="{FF2B5EF4-FFF2-40B4-BE49-F238E27FC236}">
-                <a16:creationId xmlns:a16="http://schemas.microsoft.com/office/drawing/2014/main" id="{FBFD672A-2D8C-9274-60B5-FED9A27ADCEB}"/>
+                <a16:creationId xmlns:a16="http://schemas.microsoft.com/office/drawing/2014/main" id="{7EF30618-51C9-1374-E709-89A28609F835}"/>
               </a:ext>
             </a:extLst>
           </p:cNvPr>
@@ -12363,270 +12389,109 @@
         </p:nvSpPr>
         <p:spPr>
           <a:xfrm>
-            <a:off x="3738831" y="2882992"/>
-            <a:ext cx="815546" cy="369291"/>
+            <a:off x="14731" y="4641742"/>
+            <a:ext cx="6843269" cy="3485570"/>
           </a:xfrm>
           <a:prstGeom prst="rect">
             <a:avLst/>
           </a:prstGeom>
           <a:noFill/>
-          <a:ln>
-            <a:noFill/>
-          </a:ln>
         </p:spPr>
         <p:txBody>
-          <a:bodyPr spcFirstLastPara="1" wrap="square" lIns="91425" tIns="45700" rIns="91425" bIns="45700" anchor="t" anchorCtr="0">
+          <a:bodyPr wrap="square" rtlCol="0">
             <a:spAutoFit/>
           </a:bodyPr>
           <a:lstStyle/>
           <a:p>
-            <a:pPr marL="0" marR="0" lvl="0" indent="0" algn="l" rtl="0">
-              <a:spcBef>
-                <a:spcPts val="0"/>
-              </a:spcBef>
-              <a:spcAft>
-                <a:spcPts val="0"/>
-              </a:spcAft>
-              <a:buNone/>
-            </a:pPr>
             <a:r>
-              <a:rPr lang="en-CA" sz="1800" dirty="0">
-                <a:solidFill>
-                  <a:schemeClr val="dk1"/>
-                </a:solidFill>
-              </a:rPr>
-              <a:t>e</a:t>
+              <a:rPr lang="en-CA" sz="1050" b="1" dirty="0"/>
+              <a:t>Figure 5</a:t>
             </a:r>
-            <a:endParaRPr dirty="0"/>
+            <a:r>
+              <a:rPr lang="en-CA" sz="1050" dirty="0"/>
+              <a:t>. </a:t>
+            </a:r>
+            <a:r>
+              <a:rPr lang="en-CA" sz="1050" dirty="0" err="1"/>
+              <a:t>XevaDB</a:t>
+            </a:r>
+            <a:r>
+              <a:rPr lang="en-CA" sz="1050" dirty="0"/>
+              <a:t>-based multi-omics prediction of paclitaxel response in breast cancer PDX models.</a:t>
+            </a:r>
+          </a:p>
+          <a:p>
+            <a:r>
+              <a:rPr lang="en-CA" sz="1050" dirty="0"/>
+              <a:t>(a) Case study four workflow: drug-sensitivity metrics and RNA-seq/CNV/mutation profiles for the UHN breast paclitaxel cohort are extracted from </a:t>
+            </a:r>
+            <a:r>
+              <a:rPr lang="en-CA" sz="1050" dirty="0" err="1"/>
+              <a:t>XevaDB</a:t>
+            </a:r>
+            <a:r>
+              <a:rPr lang="en-CA" sz="1050" dirty="0"/>
+              <a:t> and assembled into single-omics, early-fusion, and late-fusion modeling datasets, evaluated by cross-validation. (b) Cross-validation AUROC of the random forest classifier across single-omics (RNA-only, CNV-only, mutation-only) and multi-omics (early fusion, late fusion) feature sets; boxes show median/IQR and whiskers across repeated CV folds, diamonds mark the mean, dashed line marks chance (AUROC = 0.5). (c) Pre-ranked GSEA of the full RNA transcriptome against </a:t>
+            </a:r>
+            <a:r>
+              <a:rPr lang="en-CA" sz="1050" dirty="0" err="1"/>
+              <a:t>MSigDB</a:t>
+            </a:r>
+            <a:r>
+              <a:rPr lang="en-CA" sz="1050" dirty="0"/>
+              <a:t> Hallmark gene sets; top 6 significant pathways per direction shown (FDR q &lt; 0.05). Positive NES: enriched in Sensitive models; negative NES: enriched in Resistant models. (d) Cross-cohort comparison of transcriptomic programmes associated with paclitaxel response in UHN PDXs (n=67) and pathological complete response (</a:t>
+            </a:r>
+            <a:r>
+              <a:rPr lang="en-CA" sz="1050" dirty="0" err="1"/>
+              <a:t>pCR</a:t>
+            </a:r>
+            <a:r>
+              <a:rPr lang="en-CA" sz="1050" dirty="0"/>
+              <a:t>) in the I-SPY2 paclitaxel control arm (n=179 patients). Triangles, PDX normalized enrichment scores (NES) for </a:t>
+            </a:r>
+            <a:r>
+              <a:rPr lang="en-CA" sz="1050" dirty="0" err="1"/>
+              <a:t>MSigDB</a:t>
+            </a:r>
+            <a:r>
+              <a:rPr lang="en-CA" sz="1050" dirty="0"/>
+              <a:t> Hallmark pathways; circles, patient odds ratios (OR) for </a:t>
+            </a:r>
+            <a:r>
+              <a:rPr lang="en-CA" sz="1050" dirty="0" err="1"/>
+              <a:t>pCR</a:t>
+            </a:r>
+            <a:r>
+              <a:rPr lang="en-CA" sz="1050" dirty="0"/>
+              <a:t> per one-standard-deviation (1SD) increase in the corresponding predefined I-SPY2 signature, with 95% confidence intervals (refit from patient-level I-SPY2 data; see Methods). Markers are colored by their own direction of association (blue, Resistant; red, Sensitive), so a row is concordant when both markers share a color and discordant when they differ. Positive PDX NES indicates enrichment in sensitive PDXs, whereas patient OR values above 1 indicate higher odds of </a:t>
+            </a:r>
+            <a:r>
+              <a:rPr lang="en-CA" sz="1050" dirty="0" err="1"/>
+              <a:t>pCR</a:t>
+            </a:r>
+            <a:r>
+              <a:rPr lang="en-CA" sz="1050" dirty="0"/>
+              <a:t>. "Proliferation" reflects the median NES across five Hallmark gene sets significantly enriched in sensitive PDXs (E2F Targets, G2-M Checkpoint, Mitotic Spindle, </a:t>
+            </a:r>
+            <a:r>
+              <a:rPr lang="en-CA" sz="1050" dirty="0" err="1"/>
+              <a:t>Myc</a:t>
+            </a:r>
+            <a:r>
+              <a:rPr lang="en-CA" sz="1050" dirty="0"/>
+              <a:t> Targets V1, </a:t>
+            </a:r>
+            <a:r>
+              <a:rPr lang="en-CA" sz="1050" dirty="0" err="1"/>
+              <a:t>Myc</a:t>
+            </a:r>
+            <a:r>
+              <a:rPr lang="en-CA" sz="1050" dirty="0"/>
+              <a:t> Targets V2). Percentages indicate gene overlap between each I-SPY2 signature and its corresponding Hallmark gene set. Not all pathways shown in (c) are evaluated here: mTORC1 Signaling, Allograft Rejection, IL-6/JAK/STAT3 Signaling and Inflammatory Response lacked an I-SPY2 signature with adequate gene-level overlap and are not shown.</a:t>
+            </a:r>
           </a:p>
         </p:txBody>
       </p:sp>
-      <p:pic>
-        <p:nvPicPr>
-          <p:cNvPr id="16" name="Picture 15">
-            <a:extLst>
-              <a:ext uri="{FF2B5EF4-FFF2-40B4-BE49-F238E27FC236}">
-                <a16:creationId xmlns:a16="http://schemas.microsoft.com/office/drawing/2014/main" id="{BD4E7BB8-570A-4E6A-E29A-966481BF462D}"/>
-              </a:ext>
-            </a:extLst>
-          </p:cNvPr>
-          <p:cNvPicPr>
-            <a:picLocks noChangeAspect="1"/>
-          </p:cNvPicPr>
-          <p:nvPr/>
-        </p:nvPicPr>
-        <p:blipFill>
-          <a:blip r:embed="rId6"/>
-          <a:stretch>
-            <a:fillRect/>
-          </a:stretch>
-        </p:blipFill>
-        <p:spPr>
-          <a:xfrm>
-            <a:off x="7311014" y="2990887"/>
-            <a:ext cx="2911866" cy="2911866"/>
-          </a:xfrm>
-          <a:prstGeom prst="rect">
-            <a:avLst/>
-          </a:prstGeom>
-        </p:spPr>
-      </p:pic>
-      <p:pic>
-        <p:nvPicPr>
-          <p:cNvPr id="18" name="Picture 17">
-            <a:extLst>
-              <a:ext uri="{FF2B5EF4-FFF2-40B4-BE49-F238E27FC236}">
-                <a16:creationId xmlns:a16="http://schemas.microsoft.com/office/drawing/2014/main" id="{AF885531-729D-0D66-242F-8119B4AEEDD7}"/>
-              </a:ext>
-            </a:extLst>
-          </p:cNvPr>
-          <p:cNvPicPr>
-            <a:picLocks noChangeAspect="1"/>
-          </p:cNvPicPr>
-          <p:nvPr/>
-        </p:nvPicPr>
-        <p:blipFill>
-          <a:blip r:embed="rId7"/>
-          <a:stretch>
-            <a:fillRect/>
-          </a:stretch>
-        </p:blipFill>
-        <p:spPr>
-          <a:xfrm>
-            <a:off x="4030720" y="2985554"/>
-            <a:ext cx="2917199" cy="2917199"/>
-          </a:xfrm>
-          <a:prstGeom prst="rect">
-            <a:avLst/>
-          </a:prstGeom>
-        </p:spPr>
-      </p:pic>
-      <p:sp>
-        <p:nvSpPr>
-          <p:cNvPr id="19" name="Google Shape;91;p1">
-            <a:extLst>
-              <a:ext uri="{FF2B5EF4-FFF2-40B4-BE49-F238E27FC236}">
-                <a16:creationId xmlns:a16="http://schemas.microsoft.com/office/drawing/2014/main" id="{3875D118-23AB-1A27-DA2E-3ACC6C7B786F}"/>
-              </a:ext>
-            </a:extLst>
-          </p:cNvPr>
-          <p:cNvSpPr txBox="1"/>
-          <p:nvPr/>
-        </p:nvSpPr>
-        <p:spPr>
-          <a:xfrm>
-            <a:off x="7011576" y="2882992"/>
-            <a:ext cx="815546" cy="369291"/>
-          </a:xfrm>
-          <a:prstGeom prst="rect">
-            <a:avLst/>
-          </a:prstGeom>
-          <a:noFill/>
-          <a:ln>
-            <a:noFill/>
-          </a:ln>
-        </p:spPr>
-        <p:txBody>
-          <a:bodyPr spcFirstLastPara="1" wrap="square" lIns="91425" tIns="45700" rIns="91425" bIns="45700" anchor="t" anchorCtr="0">
-            <a:spAutoFit/>
-          </a:bodyPr>
-          <a:lstStyle/>
-          <a:p>
-            <a:pPr marL="0" marR="0" lvl="0" indent="0" algn="l" rtl="0">
-              <a:spcBef>
-                <a:spcPts val="0"/>
-              </a:spcBef>
-              <a:spcAft>
-                <a:spcPts val="0"/>
-              </a:spcAft>
-              <a:buNone/>
-            </a:pPr>
-            <a:r>
-              <a:rPr lang="en-CA" sz="1800" dirty="0">
-                <a:solidFill>
-                  <a:schemeClr val="dk1"/>
-                </a:solidFill>
-              </a:rPr>
-              <a:t>f</a:t>
-            </a:r>
-            <a:endParaRPr dirty="0"/>
-          </a:p>
-        </p:txBody>
-      </p:sp>
-      <p:sp>
-        <p:nvSpPr>
-          <p:cNvPr id="22" name="Google Shape;91;p1">
-            <a:extLst>
-              <a:ext uri="{FF2B5EF4-FFF2-40B4-BE49-F238E27FC236}">
-                <a16:creationId xmlns:a16="http://schemas.microsoft.com/office/drawing/2014/main" id="{B3A7C325-D5A7-5217-3452-7BB416CDA52A}"/>
-              </a:ext>
-            </a:extLst>
-          </p:cNvPr>
-          <p:cNvSpPr txBox="1"/>
-          <p:nvPr/>
-        </p:nvSpPr>
-        <p:spPr>
-          <a:xfrm>
-            <a:off x="10296793" y="2882992"/>
-            <a:ext cx="815546" cy="369291"/>
-          </a:xfrm>
-          <a:prstGeom prst="rect">
-            <a:avLst/>
-          </a:prstGeom>
-          <a:noFill/>
-          <a:ln>
-            <a:noFill/>
-          </a:ln>
-        </p:spPr>
-        <p:txBody>
-          <a:bodyPr spcFirstLastPara="1" wrap="square" lIns="91425" tIns="45700" rIns="91425" bIns="45700" anchor="t" anchorCtr="0">
-            <a:spAutoFit/>
-          </a:bodyPr>
-          <a:lstStyle/>
-          <a:p>
-            <a:pPr marL="0" marR="0" lvl="0" indent="0" algn="l" rtl="0">
-              <a:spcBef>
-                <a:spcPts val="0"/>
-              </a:spcBef>
-              <a:spcAft>
-                <a:spcPts val="0"/>
-              </a:spcAft>
-              <a:buNone/>
-            </a:pPr>
-            <a:r>
-              <a:rPr lang="en-CA" sz="1800" dirty="0">
-                <a:solidFill>
-                  <a:schemeClr val="dk1"/>
-                </a:solidFill>
-              </a:rPr>
-              <a:t>g</a:t>
-            </a:r>
-            <a:endParaRPr dirty="0"/>
-          </a:p>
-        </p:txBody>
-      </p:sp>
-      <p:pic>
-        <p:nvPicPr>
-          <p:cNvPr id="24" name="Picture 23">
-            <a:extLst>
-              <a:ext uri="{FF2B5EF4-FFF2-40B4-BE49-F238E27FC236}">
-                <a16:creationId xmlns:a16="http://schemas.microsoft.com/office/drawing/2014/main" id="{D3EE6C47-54C9-533D-6E8D-185E6DE75510}"/>
-              </a:ext>
-            </a:extLst>
-          </p:cNvPr>
-          <p:cNvPicPr>
-            <a:picLocks noChangeAspect="1"/>
-          </p:cNvPicPr>
-          <p:nvPr/>
-        </p:nvPicPr>
-        <p:blipFill>
-          <a:blip r:embed="rId8"/>
-          <a:srcRect r="7426" b="3594"/>
-          <a:stretch>
-            <a:fillRect/>
-          </a:stretch>
-        </p:blipFill>
-        <p:spPr>
-          <a:xfrm>
-            <a:off x="10522318" y="2882992"/>
-            <a:ext cx="3130509" cy="3003297"/>
-          </a:xfrm>
-          <a:prstGeom prst="rect">
-            <a:avLst/>
-          </a:prstGeom>
-        </p:spPr>
-      </p:pic>
-      <p:pic>
-        <p:nvPicPr>
-          <p:cNvPr id="25" name="Picture 24">
-            <a:extLst>
-              <a:ext uri="{FF2B5EF4-FFF2-40B4-BE49-F238E27FC236}">
-                <a16:creationId xmlns:a16="http://schemas.microsoft.com/office/drawing/2014/main" id="{11F2295A-D3FA-1D40-DF15-081C4AB8C6A6}"/>
-              </a:ext>
-            </a:extLst>
-          </p:cNvPr>
-          <p:cNvPicPr>
-            <a:picLocks noChangeAspect="1"/>
-          </p:cNvPicPr>
-          <p:nvPr/>
-        </p:nvPicPr>
-        <p:blipFill>
-          <a:blip r:embed="rId3"/>
-          <a:srcRect t="54686" r="50789"/>
-          <a:stretch>
-            <a:fillRect/>
-          </a:stretch>
-        </p:blipFill>
-        <p:spPr>
-          <a:xfrm>
-            <a:off x="3773217" y="525794"/>
-            <a:ext cx="3000132" cy="1941540"/>
-          </a:xfrm>
-          <a:prstGeom prst="rect">
-            <a:avLst/>
-          </a:prstGeom>
-        </p:spPr>
-      </p:pic>
     </p:spTree>
   </p:cSld>
   <p:clrMapOvr>
